--- a/docs/Probation-Review-Ahmed-AlSadeq.pptx
+++ b/docs/Probation-Review-Ahmed-AlSadeq.pptx
@@ -5,15 +5,16 @@
     <p:sldMasterId id="2147483648" r:id="rId1"/>
   </p:sldMasterIdLst>
   <p:sldIdLst>
-    <p:sldId id="256" r:id="rId7"/>
-    <p:sldId id="257" r:id="rId8"/>
-    <p:sldId id="258" r:id="rId9"/>
-    <p:sldId id="259" r:id="rId10"/>
-    <p:sldId id="260" r:id="rId11"/>
-    <p:sldId id="261" r:id="rId12"/>
-    <p:sldId id="262" r:id="rId13"/>
+    <p:sldId id="256" r:id="rId2"/>
+    <p:sldId id="257" r:id="rId3"/>
+    <p:sldId id="258" r:id="rId4"/>
+    <p:sldId id="264" r:id="rId5"/>
+    <p:sldId id="259" r:id="rId6"/>
+    <p:sldId id="260" r:id="rId7"/>
+    <p:sldId id="261" r:id="rId8"/>
+    <p:sldId id="262" r:id="rId9"/>
   </p:sldIdLst>
-  <p:sldSz cx="12188952" cy="6858000" type="screen4x3"/>
+  <p:sldSz cx="12188825" cy="6858000"/>
   <p:notesSz cx="6858000" cy="9144000"/>
   <p:defaultTextStyle>
     <a:defPPr>
@@ -110,6 +111,22 @@
       </a:defRPr>
     </a:lvl9pPr>
   </p:defaultTextStyle>
+  <p:extLst>
+    <p:ext uri="{EFAFB233-063F-42B5-8137-9DF3F51BA10A}">
+      <p15:sldGuideLst xmlns:p15="http://schemas.microsoft.com/office/powerpoint/2012/main">
+        <p15:guide id="1" orient="horz" pos="2160">
+          <p15:clr>
+            <a:srgbClr val="A4A3A4"/>
+          </p15:clr>
+        </p15:guide>
+        <p15:guide id="2" pos="2880">
+          <p15:clr>
+            <a:srgbClr val="A4A3A4"/>
+          </p15:clr>
+        </p15:guide>
+      </p15:sldGuideLst>
+    </p:ext>
+  </p:extLst>
 </p:presentation>
 </file>
 
@@ -151,10 +168,9 @@
           <a:lstStyle/>
           <a:p>
             <a:r>
-              <a:rPr lang="en-US" smtClean="0"/>
+              <a:rPr lang="en-US"/>
               <a:t>Click to edit Master title style</a:t>
             </a:r>
-            <a:endParaRPr lang="en-US"/>
           </a:p>
         </p:txBody>
       </p:sp>
@@ -270,10 +286,9 @@
           </a:lstStyle>
           <a:p>
             <a:r>
-              <a:rPr lang="en-US" smtClean="0"/>
+              <a:rPr lang="en-US"/>
               <a:t>Click to edit Master subtitle style</a:t>
             </a:r>
-            <a:endParaRPr lang="en-US"/>
           </a:p>
         </p:txBody>
       </p:sp>
@@ -294,7 +309,7 @@
           <a:p>
             <a:fld id="{5BCAD085-E8A6-8845-BD4E-CB4CCA059FC4}" type="datetimeFigureOut">
               <a:rPr lang="en-US" smtClean="0"/>
-              <a:t>1/27/13</a:t>
+              <a:t>3/10/2026</a:t>
             </a:fld>
             <a:endParaRPr lang="en-US"/>
           </a:p>
@@ -388,10 +403,9 @@
           <a:lstStyle/>
           <a:p>
             <a:r>
-              <a:rPr lang="en-US" smtClean="0"/>
+              <a:rPr lang="en-US"/>
               <a:t>Click to edit Master title style</a:t>
             </a:r>
-            <a:endParaRPr lang="en-US"/>
           </a:p>
         </p:txBody>
       </p:sp>
@@ -412,38 +426,37 @@
           <a:p>
             <a:pPr lvl="0"/>
             <a:r>
-              <a:rPr lang="en-US" smtClean="0"/>
+              <a:rPr lang="en-US"/>
               <a:t>Click to edit Master text styles</a:t>
             </a:r>
           </a:p>
           <a:p>
             <a:pPr lvl="1"/>
             <a:r>
-              <a:rPr lang="en-US" smtClean="0"/>
+              <a:rPr lang="en-US"/>
               <a:t>Second level</a:t>
             </a:r>
           </a:p>
           <a:p>
             <a:pPr lvl="2"/>
             <a:r>
-              <a:rPr lang="en-US" smtClean="0"/>
+              <a:rPr lang="en-US"/>
               <a:t>Third level</a:t>
             </a:r>
           </a:p>
           <a:p>
             <a:pPr lvl="3"/>
             <a:r>
-              <a:rPr lang="en-US" smtClean="0"/>
+              <a:rPr lang="en-US"/>
               <a:t>Fourth level</a:t>
             </a:r>
           </a:p>
           <a:p>
             <a:pPr lvl="4"/>
             <a:r>
-              <a:rPr lang="en-US" smtClean="0"/>
+              <a:rPr lang="en-US"/>
               <a:t>Fifth level</a:t>
             </a:r>
-            <a:endParaRPr lang="en-US"/>
           </a:p>
         </p:txBody>
       </p:sp>
@@ -464,7 +477,7 @@
           <a:p>
             <a:fld id="{5BCAD085-E8A6-8845-BD4E-CB4CCA059FC4}" type="datetimeFigureOut">
               <a:rPr lang="en-US" smtClean="0"/>
-              <a:t>1/27/13</a:t>
+              <a:t>3/10/2026</a:t>
             </a:fld>
             <a:endParaRPr lang="en-US"/>
           </a:p>
@@ -563,10 +576,9 @@
           <a:lstStyle/>
           <a:p>
             <a:r>
-              <a:rPr lang="en-US" smtClean="0"/>
+              <a:rPr lang="en-US"/>
               <a:t>Click to edit Master title style</a:t>
             </a:r>
-            <a:endParaRPr lang="en-US"/>
           </a:p>
         </p:txBody>
       </p:sp>
@@ -592,38 +604,37 @@
           <a:p>
             <a:pPr lvl="0"/>
             <a:r>
-              <a:rPr lang="en-US" smtClean="0"/>
+              <a:rPr lang="en-US"/>
               <a:t>Click to edit Master text styles</a:t>
             </a:r>
           </a:p>
           <a:p>
             <a:pPr lvl="1"/>
             <a:r>
-              <a:rPr lang="en-US" smtClean="0"/>
+              <a:rPr lang="en-US"/>
               <a:t>Second level</a:t>
             </a:r>
           </a:p>
           <a:p>
             <a:pPr lvl="2"/>
             <a:r>
-              <a:rPr lang="en-US" smtClean="0"/>
+              <a:rPr lang="en-US"/>
               <a:t>Third level</a:t>
             </a:r>
           </a:p>
           <a:p>
             <a:pPr lvl="3"/>
             <a:r>
-              <a:rPr lang="en-US" smtClean="0"/>
+              <a:rPr lang="en-US"/>
               <a:t>Fourth level</a:t>
             </a:r>
           </a:p>
           <a:p>
             <a:pPr lvl="4"/>
             <a:r>
-              <a:rPr lang="en-US" smtClean="0"/>
+              <a:rPr lang="en-US"/>
               <a:t>Fifth level</a:t>
             </a:r>
-            <a:endParaRPr lang="en-US"/>
           </a:p>
         </p:txBody>
       </p:sp>
@@ -644,7 +655,7 @@
           <a:p>
             <a:fld id="{5BCAD085-E8A6-8845-BD4E-CB4CCA059FC4}" type="datetimeFigureOut">
               <a:rPr lang="en-US" smtClean="0"/>
-              <a:t>1/27/13</a:t>
+              <a:t>3/10/2026</a:t>
             </a:fld>
             <a:endParaRPr lang="en-US"/>
           </a:p>
@@ -738,10 +749,9 @@
           <a:lstStyle/>
           <a:p>
             <a:r>
-              <a:rPr lang="en-US" smtClean="0"/>
+              <a:rPr lang="en-US"/>
               <a:t>Click to edit Master title style</a:t>
             </a:r>
-            <a:endParaRPr lang="en-US"/>
           </a:p>
         </p:txBody>
       </p:sp>
@@ -762,38 +772,37 @@
           <a:p>
             <a:pPr lvl="0"/>
             <a:r>
-              <a:rPr lang="en-US" smtClean="0"/>
+              <a:rPr lang="en-US"/>
               <a:t>Click to edit Master text styles</a:t>
             </a:r>
           </a:p>
           <a:p>
             <a:pPr lvl="1"/>
             <a:r>
-              <a:rPr lang="en-US" smtClean="0"/>
+              <a:rPr lang="en-US"/>
               <a:t>Second level</a:t>
             </a:r>
           </a:p>
           <a:p>
             <a:pPr lvl="2"/>
             <a:r>
-              <a:rPr lang="en-US" smtClean="0"/>
+              <a:rPr lang="en-US"/>
               <a:t>Third level</a:t>
             </a:r>
           </a:p>
           <a:p>
             <a:pPr lvl="3"/>
             <a:r>
-              <a:rPr lang="en-US" smtClean="0"/>
+              <a:rPr lang="en-US"/>
               <a:t>Fourth level</a:t>
             </a:r>
           </a:p>
           <a:p>
             <a:pPr lvl="4"/>
             <a:r>
-              <a:rPr lang="en-US" smtClean="0"/>
+              <a:rPr lang="en-US"/>
               <a:t>Fifth level</a:t>
             </a:r>
-            <a:endParaRPr lang="en-US"/>
           </a:p>
         </p:txBody>
       </p:sp>
@@ -814,7 +823,7 @@
           <a:p>
             <a:fld id="{5BCAD085-E8A6-8845-BD4E-CB4CCA059FC4}" type="datetimeFigureOut">
               <a:rPr lang="en-US" smtClean="0"/>
-              <a:t>1/27/13</a:t>
+              <a:t>3/10/2026</a:t>
             </a:fld>
             <a:endParaRPr lang="en-US"/>
           </a:p>
@@ -917,10 +926,9 @@
           </a:lstStyle>
           <a:p>
             <a:r>
-              <a:rPr lang="en-US" smtClean="0"/>
+              <a:rPr lang="en-US"/>
               <a:t>Click to edit Master title style</a:t>
             </a:r>
-            <a:endParaRPr lang="en-US"/>
           </a:p>
         </p:txBody>
       </p:sp>
@@ -1037,7 +1045,7 @@
           <a:p>
             <a:pPr lvl="0"/>
             <a:r>
-              <a:rPr lang="en-US" smtClean="0"/>
+              <a:rPr lang="en-US"/>
               <a:t>Click to edit Master text styles</a:t>
             </a:r>
           </a:p>
@@ -1060,7 +1068,7 @@
           <a:p>
             <a:fld id="{5BCAD085-E8A6-8845-BD4E-CB4CCA059FC4}" type="datetimeFigureOut">
               <a:rPr lang="en-US" smtClean="0"/>
-              <a:t>1/27/13</a:t>
+              <a:t>3/10/2026</a:t>
             </a:fld>
             <a:endParaRPr lang="en-US"/>
           </a:p>
@@ -1154,10 +1162,9 @@
           <a:lstStyle/>
           <a:p>
             <a:r>
-              <a:rPr lang="en-US" smtClean="0"/>
+              <a:rPr lang="en-US"/>
               <a:t>Click to edit Master title style</a:t>
             </a:r>
-            <a:endParaRPr lang="en-US"/>
           </a:p>
         </p:txBody>
       </p:sp>
@@ -1211,38 +1218,37 @@
           <a:p>
             <a:pPr lvl="0"/>
             <a:r>
-              <a:rPr lang="en-US" smtClean="0"/>
+              <a:rPr lang="en-US"/>
               <a:t>Click to edit Master text styles</a:t>
             </a:r>
           </a:p>
           <a:p>
             <a:pPr lvl="1"/>
             <a:r>
-              <a:rPr lang="en-US" smtClean="0"/>
+              <a:rPr lang="en-US"/>
               <a:t>Second level</a:t>
             </a:r>
           </a:p>
           <a:p>
             <a:pPr lvl="2"/>
             <a:r>
-              <a:rPr lang="en-US" smtClean="0"/>
+              <a:rPr lang="en-US"/>
               <a:t>Third level</a:t>
             </a:r>
           </a:p>
           <a:p>
             <a:pPr lvl="3"/>
             <a:r>
-              <a:rPr lang="en-US" smtClean="0"/>
+              <a:rPr lang="en-US"/>
               <a:t>Fourth level</a:t>
             </a:r>
           </a:p>
           <a:p>
             <a:pPr lvl="4"/>
             <a:r>
-              <a:rPr lang="en-US" smtClean="0"/>
+              <a:rPr lang="en-US"/>
               <a:t>Fifth level</a:t>
             </a:r>
-            <a:endParaRPr lang="en-US"/>
           </a:p>
         </p:txBody>
       </p:sp>
@@ -1296,38 +1302,37 @@
           <a:p>
             <a:pPr lvl="0"/>
             <a:r>
-              <a:rPr lang="en-US" smtClean="0"/>
+              <a:rPr lang="en-US"/>
               <a:t>Click to edit Master text styles</a:t>
             </a:r>
           </a:p>
           <a:p>
             <a:pPr lvl="1"/>
             <a:r>
-              <a:rPr lang="en-US" smtClean="0"/>
+              <a:rPr lang="en-US"/>
               <a:t>Second level</a:t>
             </a:r>
           </a:p>
           <a:p>
             <a:pPr lvl="2"/>
             <a:r>
-              <a:rPr lang="en-US" smtClean="0"/>
+              <a:rPr lang="en-US"/>
               <a:t>Third level</a:t>
             </a:r>
           </a:p>
           <a:p>
             <a:pPr lvl="3"/>
             <a:r>
-              <a:rPr lang="en-US" smtClean="0"/>
+              <a:rPr lang="en-US"/>
               <a:t>Fourth level</a:t>
             </a:r>
           </a:p>
           <a:p>
             <a:pPr lvl="4"/>
             <a:r>
-              <a:rPr lang="en-US" smtClean="0"/>
+              <a:rPr lang="en-US"/>
               <a:t>Fifth level</a:t>
             </a:r>
-            <a:endParaRPr lang="en-US"/>
           </a:p>
         </p:txBody>
       </p:sp>
@@ -1348,7 +1353,7 @@
           <a:p>
             <a:fld id="{5BCAD085-E8A6-8845-BD4E-CB4CCA059FC4}" type="datetimeFigureOut">
               <a:rPr lang="en-US" smtClean="0"/>
-              <a:t>1/27/13</a:t>
+              <a:t>3/10/2026</a:t>
             </a:fld>
             <a:endParaRPr lang="en-US"/>
           </a:p>
@@ -1446,10 +1451,9 @@
           </a:lstStyle>
           <a:p>
             <a:r>
-              <a:rPr lang="en-US" smtClean="0"/>
+              <a:rPr lang="en-US"/>
               <a:t>Click to edit Master title style</a:t>
             </a:r>
-            <a:endParaRPr lang="en-US"/>
           </a:p>
         </p:txBody>
       </p:sp>
@@ -1512,7 +1516,7 @@
           <a:p>
             <a:pPr lvl="0"/>
             <a:r>
-              <a:rPr lang="en-US" smtClean="0"/>
+              <a:rPr lang="en-US"/>
               <a:t>Click to edit Master text styles</a:t>
             </a:r>
           </a:p>
@@ -1568,38 +1572,37 @@
           <a:p>
             <a:pPr lvl="0"/>
             <a:r>
-              <a:rPr lang="en-US" smtClean="0"/>
+              <a:rPr lang="en-US"/>
               <a:t>Click to edit Master text styles</a:t>
             </a:r>
           </a:p>
           <a:p>
             <a:pPr lvl="1"/>
             <a:r>
-              <a:rPr lang="en-US" smtClean="0"/>
+              <a:rPr lang="en-US"/>
               <a:t>Second level</a:t>
             </a:r>
           </a:p>
           <a:p>
             <a:pPr lvl="2"/>
             <a:r>
-              <a:rPr lang="en-US" smtClean="0"/>
+              <a:rPr lang="en-US"/>
               <a:t>Third level</a:t>
             </a:r>
           </a:p>
           <a:p>
             <a:pPr lvl="3"/>
             <a:r>
-              <a:rPr lang="en-US" smtClean="0"/>
+              <a:rPr lang="en-US"/>
               <a:t>Fourth level</a:t>
             </a:r>
           </a:p>
           <a:p>
             <a:pPr lvl="4"/>
             <a:r>
-              <a:rPr lang="en-US" smtClean="0"/>
+              <a:rPr lang="en-US"/>
               <a:t>Fifth level</a:t>
             </a:r>
-            <a:endParaRPr lang="en-US"/>
           </a:p>
         </p:txBody>
       </p:sp>
@@ -1662,7 +1665,7 @@
           <a:p>
             <a:pPr lvl="0"/>
             <a:r>
-              <a:rPr lang="en-US" smtClean="0"/>
+              <a:rPr lang="en-US"/>
               <a:t>Click to edit Master text styles</a:t>
             </a:r>
           </a:p>
@@ -1718,38 +1721,37 @@
           <a:p>
             <a:pPr lvl="0"/>
             <a:r>
-              <a:rPr lang="en-US" smtClean="0"/>
+              <a:rPr lang="en-US"/>
               <a:t>Click to edit Master text styles</a:t>
             </a:r>
           </a:p>
           <a:p>
             <a:pPr lvl="1"/>
             <a:r>
-              <a:rPr lang="en-US" smtClean="0"/>
+              <a:rPr lang="en-US"/>
               <a:t>Second level</a:t>
             </a:r>
           </a:p>
           <a:p>
             <a:pPr lvl="2"/>
             <a:r>
-              <a:rPr lang="en-US" smtClean="0"/>
+              <a:rPr lang="en-US"/>
               <a:t>Third level</a:t>
             </a:r>
           </a:p>
           <a:p>
             <a:pPr lvl="3"/>
             <a:r>
-              <a:rPr lang="en-US" smtClean="0"/>
+              <a:rPr lang="en-US"/>
               <a:t>Fourth level</a:t>
             </a:r>
           </a:p>
           <a:p>
             <a:pPr lvl="4"/>
             <a:r>
-              <a:rPr lang="en-US" smtClean="0"/>
+              <a:rPr lang="en-US"/>
               <a:t>Fifth level</a:t>
             </a:r>
-            <a:endParaRPr lang="en-US"/>
           </a:p>
         </p:txBody>
       </p:sp>
@@ -1770,7 +1772,7 @@
           <a:p>
             <a:fld id="{5BCAD085-E8A6-8845-BD4E-CB4CCA059FC4}" type="datetimeFigureOut">
               <a:rPr lang="en-US" smtClean="0"/>
-              <a:t>1/27/13</a:t>
+              <a:t>3/10/2026</a:t>
             </a:fld>
             <a:endParaRPr lang="en-US"/>
           </a:p>
@@ -1864,10 +1866,9 @@
           <a:lstStyle/>
           <a:p>
             <a:r>
-              <a:rPr lang="en-US" smtClean="0"/>
+              <a:rPr lang="en-US"/>
               <a:t>Click to edit Master title style</a:t>
             </a:r>
-            <a:endParaRPr lang="en-US"/>
           </a:p>
         </p:txBody>
       </p:sp>
@@ -1888,7 +1889,7 @@
           <a:p>
             <a:fld id="{5BCAD085-E8A6-8845-BD4E-CB4CCA059FC4}" type="datetimeFigureOut">
               <a:rPr lang="en-US" smtClean="0"/>
-              <a:t>1/27/13</a:t>
+              <a:t>3/10/2026</a:t>
             </a:fld>
             <a:endParaRPr lang="en-US"/>
           </a:p>
@@ -1983,7 +1984,7 @@
           <a:p>
             <a:fld id="{5BCAD085-E8A6-8845-BD4E-CB4CCA059FC4}" type="datetimeFigureOut">
               <a:rPr lang="en-US" smtClean="0"/>
-              <a:t>1/27/13</a:t>
+              <a:t>3/10/2026</a:t>
             </a:fld>
             <a:endParaRPr lang="en-US"/>
           </a:p>
@@ -2086,10 +2087,9 @@
           </a:lstStyle>
           <a:p>
             <a:r>
-              <a:rPr lang="en-US" smtClean="0"/>
+              <a:rPr lang="en-US"/>
               <a:t>Click to edit Master title style</a:t>
             </a:r>
-            <a:endParaRPr lang="en-US"/>
           </a:p>
         </p:txBody>
       </p:sp>
@@ -2143,38 +2143,37 @@
           <a:p>
             <a:pPr lvl="0"/>
             <a:r>
-              <a:rPr lang="en-US" smtClean="0"/>
+              <a:rPr lang="en-US"/>
               <a:t>Click to edit Master text styles</a:t>
             </a:r>
           </a:p>
           <a:p>
             <a:pPr lvl="1"/>
             <a:r>
-              <a:rPr lang="en-US" smtClean="0"/>
+              <a:rPr lang="en-US"/>
               <a:t>Second level</a:t>
             </a:r>
           </a:p>
           <a:p>
             <a:pPr lvl="2"/>
             <a:r>
-              <a:rPr lang="en-US" smtClean="0"/>
+              <a:rPr lang="en-US"/>
               <a:t>Third level</a:t>
             </a:r>
           </a:p>
           <a:p>
             <a:pPr lvl="3"/>
             <a:r>
-              <a:rPr lang="en-US" smtClean="0"/>
+              <a:rPr lang="en-US"/>
               <a:t>Fourth level</a:t>
             </a:r>
           </a:p>
           <a:p>
             <a:pPr lvl="4"/>
             <a:r>
-              <a:rPr lang="en-US" smtClean="0"/>
+              <a:rPr lang="en-US"/>
               <a:t>Fifth level</a:t>
             </a:r>
-            <a:endParaRPr lang="en-US"/>
           </a:p>
         </p:txBody>
       </p:sp>
@@ -2237,7 +2236,7 @@
           <a:p>
             <a:pPr lvl="0"/>
             <a:r>
-              <a:rPr lang="en-US" smtClean="0"/>
+              <a:rPr lang="en-US"/>
               <a:t>Click to edit Master text styles</a:t>
             </a:r>
           </a:p>
@@ -2260,7 +2259,7 @@
           <a:p>
             <a:fld id="{5BCAD085-E8A6-8845-BD4E-CB4CCA059FC4}" type="datetimeFigureOut">
               <a:rPr lang="en-US" smtClean="0"/>
-              <a:t>1/27/13</a:t>
+              <a:t>3/10/2026</a:t>
             </a:fld>
             <a:endParaRPr lang="en-US"/>
           </a:p>
@@ -2363,10 +2362,9 @@
           </a:lstStyle>
           <a:p>
             <a:r>
-              <a:rPr lang="en-US" smtClean="0"/>
+              <a:rPr lang="en-US"/>
               <a:t>Click to edit Master title style</a:t>
             </a:r>
-            <a:endParaRPr lang="en-US"/>
           </a:p>
         </p:txBody>
       </p:sp>
@@ -2490,7 +2488,7 @@
           <a:p>
             <a:pPr lvl="0"/>
             <a:r>
-              <a:rPr lang="en-US" smtClean="0"/>
+              <a:rPr lang="en-US"/>
               <a:t>Click to edit Master text styles</a:t>
             </a:r>
           </a:p>
@@ -2513,7 +2511,7 @@
           <a:p>
             <a:fld id="{5BCAD085-E8A6-8845-BD4E-CB4CCA059FC4}" type="datetimeFigureOut">
               <a:rPr lang="en-US" smtClean="0"/>
-              <a:t>1/27/13</a:t>
+              <a:t>3/10/2026</a:t>
             </a:fld>
             <a:endParaRPr lang="en-US"/>
           </a:p>
@@ -2622,10 +2620,9 @@
           <a:lstStyle/>
           <a:p>
             <a:r>
-              <a:rPr lang="en-US" smtClean="0"/>
+              <a:rPr lang="en-US"/>
               <a:t>Click to edit Master title style</a:t>
             </a:r>
-            <a:endParaRPr lang="en-US"/>
           </a:p>
         </p:txBody>
       </p:sp>
@@ -2656,38 +2653,37 @@
           <a:p>
             <a:pPr lvl="0"/>
             <a:r>
-              <a:rPr lang="en-US" smtClean="0"/>
+              <a:rPr lang="en-US"/>
               <a:t>Click to edit Master text styles</a:t>
             </a:r>
           </a:p>
           <a:p>
             <a:pPr lvl="1"/>
             <a:r>
-              <a:rPr lang="en-US" smtClean="0"/>
+              <a:rPr lang="en-US"/>
               <a:t>Second level</a:t>
             </a:r>
           </a:p>
           <a:p>
             <a:pPr lvl="2"/>
             <a:r>
-              <a:rPr lang="en-US" smtClean="0"/>
+              <a:rPr lang="en-US"/>
               <a:t>Third level</a:t>
             </a:r>
           </a:p>
           <a:p>
             <a:pPr lvl="3"/>
             <a:r>
-              <a:rPr lang="en-US" smtClean="0"/>
+              <a:rPr lang="en-US"/>
               <a:t>Fourth level</a:t>
             </a:r>
           </a:p>
           <a:p>
             <a:pPr lvl="4"/>
             <a:r>
-              <a:rPr lang="en-US" smtClean="0"/>
+              <a:rPr lang="en-US"/>
               <a:t>Fifth level</a:t>
             </a:r>
-            <a:endParaRPr lang="en-US"/>
           </a:p>
         </p:txBody>
       </p:sp>
@@ -2726,7 +2722,7 @@
           <a:p>
             <a:fld id="{5BCAD085-E8A6-8845-BD4E-CB4CCA059FC4}" type="datetimeFigureOut">
               <a:rPr lang="en-US" smtClean="0"/>
-              <a:t>1/27/13</a:t>
+              <a:t>3/10/2026</a:t>
             </a:fld>
             <a:endParaRPr lang="en-US"/>
           </a:p>
@@ -3085,7 +3081,7 @@
 </file>
 
 <file path=ppt/slides/slide1.xml><?xml version="1.0" encoding="utf-8"?>
-<p:sld xmlns:a="http://schemas.openxmlformats.org/drawingml/2006/main" xmlns:p="http://schemas.openxmlformats.org/presentationml/2006/main" xmlns:r="http://schemas.openxmlformats.org/officeDocument/2006/relationships">
+<p:sld xmlns:a="http://schemas.openxmlformats.org/drawingml/2006/main" xmlns:r="http://schemas.openxmlformats.org/officeDocument/2006/relationships" xmlns:p="http://schemas.openxmlformats.org/presentationml/2006/main">
   <p:cSld>
     <p:bg>
       <p:bgPr>
@@ -3101,7 +3097,14 @@
         <p:cNvGrpSpPr/>
         <p:nvPr/>
       </p:nvGrpSpPr>
-      <p:grpSpPr/>
+      <p:grpSpPr>
+        <a:xfrm>
+          <a:off x="0" y="0"/>
+          <a:ext cx="0" cy="0"/>
+          <a:chOff x="0" y="0"/>
+          <a:chExt cx="0" cy="0"/>
+        </a:xfrm>
+      </p:grpSpPr>
       <p:sp>
         <p:nvSpPr>
           <p:cNvPr id="2" name="Rectangle 1"/>
@@ -3142,6 +3145,7 @@
           <a:lstStyle/>
           <a:p>
             <a:pPr algn="ctr"/>
+            <a:endParaRPr/>
           </a:p>
         </p:txBody>
       </p:sp>
@@ -3185,6 +3189,7 @@
           <a:lstStyle/>
           <a:p>
             <a:pPr algn="ctr"/>
+            <a:endParaRPr/>
           </a:p>
         </p:txBody>
       </p:sp>
@@ -3228,6 +3233,7 @@
           <a:lstStyle/>
           <a:p>
             <a:pPr algn="ctr"/>
+            <a:endParaRPr/>
           </a:p>
         </p:txBody>
       </p:sp>
@@ -3271,6 +3277,7 @@
           <a:lstStyle/>
           <a:p>
             <a:pPr algn="ctr"/>
+            <a:endParaRPr/>
           </a:p>
         </p:txBody>
       </p:sp>
@@ -3314,6 +3321,7 @@
           <a:lstStyle/>
           <a:p>
             <a:pPr algn="ctr"/>
+            <a:endParaRPr/>
           </a:p>
         </p:txBody>
       </p:sp>
@@ -3357,6 +3365,7 @@
           <a:lstStyle/>
           <a:p>
             <a:pPr algn="ctr"/>
+            <a:endParaRPr/>
           </a:p>
         </p:txBody>
       </p:sp>
@@ -3400,6 +3409,7 @@
           <a:lstStyle/>
           <a:p>
             <a:pPr algn="ctr"/>
+            <a:endParaRPr/>
           </a:p>
         </p:txBody>
       </p:sp>
@@ -3443,6 +3453,7 @@
           <a:lstStyle/>
           <a:p>
             <a:pPr algn="ctr"/>
+            <a:endParaRPr/>
           </a:p>
         </p:txBody>
       </p:sp>
@@ -3486,6 +3497,7 @@
           <a:lstStyle/>
           <a:p>
             <a:pPr algn="ctr"/>
+            <a:endParaRPr/>
           </a:p>
         </p:txBody>
       </p:sp>
@@ -3529,6 +3541,7 @@
           <a:lstStyle/>
           <a:p>
             <a:pPr algn="ctr"/>
+            <a:endParaRPr/>
           </a:p>
         </p:txBody>
       </p:sp>
@@ -3572,6 +3585,7 @@
           <a:lstStyle/>
           <a:p>
             <a:pPr algn="ctr"/>
+            <a:endParaRPr/>
           </a:p>
         </p:txBody>
       </p:sp>
@@ -3615,6 +3629,7 @@
           <a:lstStyle/>
           <a:p>
             <a:pPr algn="ctr"/>
+            <a:endParaRPr/>
           </a:p>
         </p:txBody>
       </p:sp>
@@ -3658,6 +3673,7 @@
           <a:lstStyle/>
           <a:p>
             <a:pPr algn="ctr"/>
+            <a:endParaRPr/>
           </a:p>
         </p:txBody>
       </p:sp>
@@ -3703,6 +3719,7 @@
           <a:lstStyle/>
           <a:p>
             <a:pPr algn="ctr"/>
+            <a:endParaRPr/>
           </a:p>
         </p:txBody>
       </p:sp>
@@ -3860,6 +3877,7 @@
           <a:lstStyle/>
           <a:p>
             <a:pPr algn="ctr"/>
+            <a:endParaRPr/>
           </a:p>
         </p:txBody>
       </p:sp>
@@ -3872,7 +3890,7 @@
         <p:spPr>
           <a:xfrm>
             <a:off x="457200" y="3886200"/>
-            <a:ext cx="4572000" cy="457200"/>
+            <a:ext cx="4572000" cy="400110"/>
           </a:xfrm>
           <a:prstGeom prst="rect">
             <a:avLst/>
@@ -3890,14 +3908,29 @@
           <a:p>
             <a:pPr algn="l"/>
             <a:r>
-              <a:rPr sz="2000" b="1">
+              <a:rPr sz="2000" b="1" dirty="0">
                 <a:solidFill>
                   <a:srgbClr val="FFFFFF"/>
                 </a:solidFill>
                 <a:latin typeface="Calibri"/>
               </a:rPr>
-              <a:t>Ahmed Al-Sadeq</a:t>
-            </a:r>
+              <a:t>Ahmed </a:t>
+            </a:r>
+            <a:r>
+              <a:rPr lang="en-US" sz="2000" b="1" dirty="0">
+                <a:solidFill>
+                  <a:srgbClr val="FFFFFF"/>
+                </a:solidFill>
+                <a:latin typeface="Calibri"/>
+              </a:rPr>
+              <a:t>Elsadek</a:t>
+            </a:r>
+            <a:endParaRPr sz="2000" b="1" dirty="0">
+              <a:solidFill>
+                <a:srgbClr val="FFFFFF"/>
+              </a:solidFill>
+              <a:latin typeface="Calibri"/>
+            </a:endParaRPr>
           </a:p>
         </p:txBody>
       </p:sp>
@@ -3977,6 +4010,36 @@
           </a:p>
         </p:txBody>
       </p:sp>
+      <p:pic>
+        <p:nvPicPr>
+          <p:cNvPr id="25" name="Picture 24">
+            <a:extLst>
+              <a:ext uri="{FF2B5EF4-FFF2-40B4-BE49-F238E27FC236}">
+                <a16:creationId xmlns:a16="http://schemas.microsoft.com/office/drawing/2014/main" id="{6EDDDFC4-E979-4339-66EB-88160023378B}"/>
+              </a:ext>
+            </a:extLst>
+          </p:cNvPr>
+          <p:cNvPicPr>
+            <a:picLocks noChangeAspect="1"/>
+          </p:cNvPicPr>
+          <p:nvPr/>
+        </p:nvPicPr>
+        <p:blipFill>
+          <a:blip r:embed="rId2"/>
+          <a:stretch>
+            <a:fillRect/>
+          </a:stretch>
+        </p:blipFill>
+        <p:spPr>
+          <a:xfrm>
+            <a:off x="9860733" y="205308"/>
+            <a:ext cx="2224134" cy="2149704"/>
+          </a:xfrm>
+          <a:prstGeom prst="rect">
+            <a:avLst/>
+          </a:prstGeom>
+        </p:spPr>
+      </p:pic>
     </p:spTree>
   </p:cSld>
   <p:clrMapOvr>
@@ -3986,7 +4049,7 @@
 </file>
 
 <file path=ppt/slides/slide2.xml><?xml version="1.0" encoding="utf-8"?>
-<p:sld xmlns:a="http://schemas.openxmlformats.org/drawingml/2006/main" xmlns:p="http://schemas.openxmlformats.org/presentationml/2006/main" xmlns:r="http://schemas.openxmlformats.org/officeDocument/2006/relationships">
+<p:sld xmlns:a="http://schemas.openxmlformats.org/drawingml/2006/main" xmlns:r="http://schemas.openxmlformats.org/officeDocument/2006/relationships" xmlns:p="http://schemas.openxmlformats.org/presentationml/2006/main">
   <p:cSld>
     <p:bg>
       <p:bgPr>
@@ -4002,7 +4065,14 @@
         <p:cNvGrpSpPr/>
         <p:nvPr/>
       </p:nvGrpSpPr>
-      <p:grpSpPr/>
+      <p:grpSpPr>
+        <a:xfrm>
+          <a:off x="0" y="0"/>
+          <a:ext cx="0" cy="0"/>
+          <a:chOff x="0" y="0"/>
+          <a:chExt cx="0" cy="0"/>
+        </a:xfrm>
+      </p:grpSpPr>
       <p:sp>
         <p:nvSpPr>
           <p:cNvPr id="2" name="TextBox 1"/>
@@ -4119,6 +4189,7 @@
           <a:lstStyle/>
           <a:p>
             <a:pPr algn="ctr"/>
+            <a:endParaRPr/>
           </a:p>
         </p:txBody>
       </p:sp>
@@ -4162,6 +4233,7 @@
           <a:lstStyle/>
           <a:p>
             <a:pPr algn="ctr"/>
+            <a:endParaRPr/>
           </a:p>
         </p:txBody>
       </p:sp>
@@ -4281,6 +4353,7 @@
           <a:lstStyle/>
           <a:p>
             <a:pPr algn="ctr"/>
+            <a:endParaRPr/>
           </a:p>
         </p:txBody>
       </p:sp>
@@ -4400,6 +4473,7 @@
           <a:lstStyle/>
           <a:p>
             <a:pPr algn="ctr"/>
+            <a:endParaRPr/>
           </a:p>
         </p:txBody>
       </p:sp>
@@ -4519,6 +4593,7 @@
           <a:lstStyle/>
           <a:p>
             <a:pPr algn="ctr"/>
+            <a:endParaRPr/>
           </a:p>
         </p:txBody>
       </p:sp>
@@ -4645,7 +4720,7 @@
         <p:spPr>
           <a:xfrm>
             <a:off x="5120640" y="1874519"/>
-            <a:ext cx="6583680" cy="1417320"/>
+            <a:ext cx="6583680" cy="1169551"/>
           </a:xfrm>
           <a:prstGeom prst="rect">
             <a:avLst/>
@@ -4663,7 +4738,7 @@
           <a:p>
             <a:pPr algn="l"/>
             <a:r>
-              <a:rPr sz="1300" b="0">
+              <a:rPr sz="1400" b="1" dirty="0">
                 <a:solidFill>
                   <a:srgbClr val="B0BEC5"/>
                 </a:solidFill>
@@ -4873,7 +4948,7 @@
         <p:spPr>
           <a:xfrm>
             <a:off x="5120640" y="5148072"/>
-            <a:ext cx="6583680" cy="329184"/>
+            <a:ext cx="6583680" cy="292388"/>
           </a:xfrm>
           <a:prstGeom prst="rect">
             <a:avLst/>
@@ -4891,17 +4966,62 @@
           <a:p>
             <a:pPr algn="l"/>
             <a:r>
-              <a:rPr sz="1300" b="0">
+              <a:rPr sz="1300" b="0" dirty="0">
                 <a:solidFill>
                   <a:srgbClr val="FFFFFF"/>
                 </a:solidFill>
                 <a:latin typeface="Calibri"/>
               </a:rPr>
-              <a:t>▸  HR data, reporting, and dashboards</a:t>
-            </a:r>
-          </a:p>
-        </p:txBody>
-      </p:sp>
+              <a:t>▸  HR data reporting, and </a:t>
+            </a:r>
+            <a:r>
+              <a:rPr lang="en-US" sz="1300" b="0" dirty="0">
+                <a:solidFill>
+                  <a:srgbClr val="FFFFFF"/>
+                </a:solidFill>
+                <a:latin typeface="Calibri"/>
+              </a:rPr>
+              <a:t>Analysis.</a:t>
+            </a:r>
+            <a:endParaRPr sz="1300" b="0" dirty="0">
+              <a:solidFill>
+                <a:srgbClr val="FFFFFF"/>
+              </a:solidFill>
+              <a:latin typeface="Calibri"/>
+            </a:endParaRPr>
+          </a:p>
+        </p:txBody>
+      </p:sp>
+      <p:pic>
+        <p:nvPicPr>
+          <p:cNvPr id="26" name="Picture 25">
+            <a:extLst>
+              <a:ext uri="{FF2B5EF4-FFF2-40B4-BE49-F238E27FC236}">
+                <a16:creationId xmlns:a16="http://schemas.microsoft.com/office/drawing/2014/main" id="{7BC04073-677C-FF37-B88E-B88B8FEAEBE2}"/>
+              </a:ext>
+            </a:extLst>
+          </p:cNvPr>
+          <p:cNvPicPr>
+            <a:picLocks noChangeAspect="1"/>
+          </p:cNvPicPr>
+          <p:nvPr/>
+        </p:nvPicPr>
+        <p:blipFill>
+          <a:blip r:embed="rId2"/>
+          <a:stretch>
+            <a:fillRect/>
+          </a:stretch>
+        </p:blipFill>
+        <p:spPr>
+          <a:xfrm>
+            <a:off x="10945933" y="205308"/>
+            <a:ext cx="968134" cy="935736"/>
+          </a:xfrm>
+          <a:prstGeom prst="rect">
+            <a:avLst/>
+          </a:prstGeom>
+        </p:spPr>
+      </p:pic>
     </p:spTree>
   </p:cSld>
   <p:clrMapOvr>
@@ -4911,7 +5031,7 @@
 </file>
 
 <file path=ppt/slides/slide3.xml><?xml version="1.0" encoding="utf-8"?>
-<p:sld xmlns:a="http://schemas.openxmlformats.org/drawingml/2006/main" xmlns:p="http://schemas.openxmlformats.org/presentationml/2006/main" xmlns:r="http://schemas.openxmlformats.org/officeDocument/2006/relationships">
+<p:sld xmlns:a="http://schemas.openxmlformats.org/drawingml/2006/main" xmlns:r="http://schemas.openxmlformats.org/officeDocument/2006/relationships" xmlns:p="http://schemas.openxmlformats.org/presentationml/2006/main">
   <p:cSld>
     <p:bg>
       <p:bgPr>
@@ -4927,7 +5047,14 @@
         <p:cNvGrpSpPr/>
         <p:nvPr/>
       </p:nvGrpSpPr>
-      <p:grpSpPr/>
+      <p:grpSpPr>
+        <a:xfrm>
+          <a:off x="0" y="0"/>
+          <a:ext cx="0" cy="0"/>
+          <a:chOff x="0" y="0"/>
+          <a:chExt cx="0" cy="0"/>
+        </a:xfrm>
+      </p:grpSpPr>
       <p:sp>
         <p:nvSpPr>
           <p:cNvPr id="2" name="TextBox 1"/>
@@ -4993,7 +5120,7 @@
           <a:p>
             <a:pPr algn="l"/>
             <a:r>
-              <a:rPr sz="3400" b="1">
+              <a:rPr sz="3400" b="1" dirty="0">
                 <a:solidFill>
                   <a:srgbClr val="FFFFFF"/>
                 </a:solidFill>
@@ -5044,18 +5171,25 @@
           <a:lstStyle/>
           <a:p>
             <a:pPr algn="ctr"/>
-          </a:p>
-        </p:txBody>
-      </p:sp>
-      <p:sp>
-        <p:nvSpPr>
-          <p:cNvPr id="5" name="Rectangle 4"/>
+            <a:endParaRPr/>
+          </a:p>
+        </p:txBody>
+      </p:sp>
+      <p:sp>
+        <p:nvSpPr>
+          <p:cNvPr id="26" name="Rectangle 25">
+            <a:extLst>
+              <a:ext uri="{FF2B5EF4-FFF2-40B4-BE49-F238E27FC236}">
+                <a16:creationId xmlns:a16="http://schemas.microsoft.com/office/drawing/2014/main" id="{C0509975-30CE-AF35-D8FB-2A445C32860D}"/>
+              </a:ext>
+            </a:extLst>
+          </p:cNvPr>
           <p:cNvSpPr/>
           <p:nvPr/>
         </p:nvSpPr>
         <p:spPr>
           <a:xfrm>
-            <a:off x="457200" y="1481328"/>
+            <a:off x="457200" y="3946287"/>
             <a:ext cx="3657600" cy="1920240"/>
           </a:xfrm>
           <a:prstGeom prst="rect">
@@ -5089,19 +5223,26 @@
           <a:lstStyle/>
           <a:p>
             <a:pPr algn="ctr"/>
-          </a:p>
-        </p:txBody>
-      </p:sp>
-      <p:sp>
-        <p:nvSpPr>
-          <p:cNvPr id="6" name="TextBox 5"/>
+            <a:endParaRPr dirty="0"/>
+          </a:p>
+        </p:txBody>
+      </p:sp>
+      <p:sp>
+        <p:nvSpPr>
+          <p:cNvPr id="27" name="TextBox 26">
+            <a:extLst>
+              <a:ext uri="{FF2B5EF4-FFF2-40B4-BE49-F238E27FC236}">
+                <a16:creationId xmlns:a16="http://schemas.microsoft.com/office/drawing/2014/main" id="{CA5B70B9-9472-463F-1D84-2000F266B740}"/>
+              </a:ext>
+            </a:extLst>
+          </p:cNvPr>
           <p:cNvSpPr txBox="1"/>
           <p:nvPr/>
         </p:nvSpPr>
         <p:spPr>
           <a:xfrm>
-            <a:off x="640080" y="1572768"/>
-            <a:ext cx="3291840" cy="868680"/>
+            <a:off x="640080" y="3969991"/>
+            <a:ext cx="3291840" cy="923330"/>
           </a:xfrm>
           <a:prstGeom prst="rect">
             <a:avLst/>
@@ -5119,26 +5260,38 @@
           <a:p>
             <a:pPr algn="l"/>
             <a:r>
-              <a:rPr sz="5400" b="1">
+              <a:rPr lang="en-US" sz="5400" b="1" dirty="0">
                 <a:solidFill>
                   <a:srgbClr val="F5C430"/>
                 </a:solidFill>
                 <a:latin typeface="Calibri"/>
               </a:rPr>
-              <a:t>100</a:t>
-            </a:r>
-          </a:p>
-        </p:txBody>
-      </p:sp>
-      <p:sp>
-        <p:nvSpPr>
-          <p:cNvPr id="7" name="TextBox 6"/>
+              <a:t>125</a:t>
+            </a:r>
+            <a:endParaRPr sz="5400" b="1" dirty="0">
+              <a:solidFill>
+                <a:srgbClr val="F5C430"/>
+              </a:solidFill>
+              <a:latin typeface="Calibri"/>
+            </a:endParaRPr>
+          </a:p>
+        </p:txBody>
+      </p:sp>
+      <p:sp>
+        <p:nvSpPr>
+          <p:cNvPr id="28" name="TextBox 27">
+            <a:extLst>
+              <a:ext uri="{FF2B5EF4-FFF2-40B4-BE49-F238E27FC236}">
+                <a16:creationId xmlns:a16="http://schemas.microsoft.com/office/drawing/2014/main" id="{2D9F75FC-00FE-5052-D85B-E5F39238A07C}"/>
+              </a:ext>
+            </a:extLst>
+          </p:cNvPr>
           <p:cNvSpPr txBox="1"/>
           <p:nvPr/>
         </p:nvSpPr>
         <p:spPr>
           <a:xfrm>
-            <a:off x="640080" y="2377440"/>
+            <a:off x="640080" y="4723861"/>
             <a:ext cx="3291840" cy="320040"/>
           </a:xfrm>
           <a:prstGeom prst="rect">
@@ -5157,7 +5310,7 @@
           <a:p>
             <a:pPr algn="l"/>
             <a:r>
-              <a:rPr sz="1300" b="1">
+              <a:rPr sz="1300" b="1" dirty="0">
                 <a:solidFill>
                   <a:srgbClr val="FFFFFF"/>
                 </a:solidFill>
@@ -5170,14 +5323,20 @@
       </p:sp>
       <p:sp>
         <p:nvSpPr>
-          <p:cNvPr id="8" name="TextBox 7"/>
+          <p:cNvPr id="29" name="TextBox 28">
+            <a:extLst>
+              <a:ext uri="{FF2B5EF4-FFF2-40B4-BE49-F238E27FC236}">
+                <a16:creationId xmlns:a16="http://schemas.microsoft.com/office/drawing/2014/main" id="{C65660AF-B18A-45F9-D632-B121A33346A9}"/>
+              </a:ext>
+            </a:extLst>
+          </p:cNvPr>
           <p:cNvSpPr txBox="1"/>
           <p:nvPr/>
         </p:nvSpPr>
         <p:spPr>
           <a:xfrm>
-            <a:off x="640080" y="2706624"/>
-            <a:ext cx="3291840" cy="502920"/>
+            <a:off x="640080" y="5044578"/>
+            <a:ext cx="3291840" cy="430887"/>
           </a:xfrm>
           <a:prstGeom prst="rect">
             <a:avLst/>
@@ -5195,27 +5354,65 @@
           <a:p>
             <a:pPr algn="l"/>
             <a:r>
-              <a:rPr sz="1100" b="0">
+              <a:rPr sz="1100" b="1" dirty="0">
                 <a:solidFill>
                   <a:srgbClr val="B0BEC5"/>
                 </a:solidFill>
                 <a:latin typeface="Calibri"/>
               </a:rPr>
-              <a:t>End-to-end onboarding for 100
-employees within 3 months</a:t>
-            </a:r>
-          </a:p>
-        </p:txBody>
-      </p:sp>
-      <p:sp>
-        <p:nvSpPr>
-          <p:cNvPr id="9" name="Rectangle 8"/>
+              <a:t>End-to-end onboarding for </a:t>
+            </a:r>
+            <a:r>
+              <a:rPr lang="en-US" sz="1100" b="1" dirty="0">
+                <a:solidFill>
+                  <a:srgbClr val="B0BEC5"/>
+                </a:solidFill>
+                <a:latin typeface="Calibri"/>
+              </a:rPr>
+              <a:t>125 </a:t>
+            </a:r>
+            <a:r>
+              <a:rPr sz="1100" b="1" dirty="0">
+                <a:solidFill>
+                  <a:srgbClr val="B0BEC5"/>
+                </a:solidFill>
+                <a:latin typeface="Calibri"/>
+              </a:rPr>
+              <a:t>employees within 3 months</a:t>
+            </a:r>
+            <a:r>
+              <a:rPr lang="en-US" sz="1100" b="1" dirty="0">
+                <a:solidFill>
+                  <a:srgbClr val="B0BEC5"/>
+                </a:solidFill>
+                <a:latin typeface="Calibri"/>
+              </a:rPr>
+              <a:t> on 9 Sessions</a:t>
+            </a:r>
+            <a:endParaRPr sz="1100" b="1" dirty="0">
+              <a:solidFill>
+                <a:srgbClr val="B0BEC5"/>
+              </a:solidFill>
+              <a:latin typeface="Calibri"/>
+            </a:endParaRPr>
+          </a:p>
+        </p:txBody>
+      </p:sp>
+      <p:sp>
+        <p:nvSpPr>
+          <p:cNvPr id="30" name="Rectangle 29">
+            <a:extLst>
+              <a:ext uri="{FF2B5EF4-FFF2-40B4-BE49-F238E27FC236}">
+                <a16:creationId xmlns:a16="http://schemas.microsoft.com/office/drawing/2014/main" id="{9AA84AD7-1021-4FED-DF20-626BE4FE53A2}"/>
+              </a:ext>
+            </a:extLst>
+          </p:cNvPr>
           <p:cNvSpPr/>
           <p:nvPr/>
         </p:nvSpPr>
         <p:spPr>
           <a:xfrm>
-            <a:off x="4343400" y="1481328"/>
+            <a:off x="4343400" y="3946287"/>
             <a:ext cx="3657600" cy="1920240"/>
           </a:xfrm>
           <a:prstGeom prst="rect">
@@ -5249,18 +5446,25 @@
           <a:lstStyle/>
           <a:p>
             <a:pPr algn="ctr"/>
-          </a:p>
-        </p:txBody>
-      </p:sp>
-      <p:sp>
-        <p:nvSpPr>
-          <p:cNvPr id="10" name="TextBox 9"/>
+            <a:endParaRPr/>
+          </a:p>
+        </p:txBody>
+      </p:sp>
+      <p:sp>
+        <p:nvSpPr>
+          <p:cNvPr id="31" name="TextBox 30">
+            <a:extLst>
+              <a:ext uri="{FF2B5EF4-FFF2-40B4-BE49-F238E27FC236}">
+                <a16:creationId xmlns:a16="http://schemas.microsoft.com/office/drawing/2014/main" id="{77B42C26-DBF5-7D2C-6BCE-81CF1135970B}"/>
+              </a:ext>
+            </a:extLst>
+          </p:cNvPr>
           <p:cNvSpPr txBox="1"/>
           <p:nvPr/>
         </p:nvSpPr>
         <p:spPr>
           <a:xfrm>
-            <a:off x="4526280" y="1572768"/>
+            <a:off x="4526280" y="3969991"/>
             <a:ext cx="3291840" cy="868680"/>
           </a:xfrm>
           <a:prstGeom prst="rect">
@@ -5279,7 +5483,7 @@
           <a:p>
             <a:pPr algn="l"/>
             <a:r>
-              <a:rPr sz="5400" b="1">
+              <a:rPr sz="5400" b="1" dirty="0">
                 <a:solidFill>
                   <a:srgbClr val="F5C430"/>
                 </a:solidFill>
@@ -5292,14 +5496,20 @@
       </p:sp>
       <p:sp>
         <p:nvSpPr>
-          <p:cNvPr id="11" name="TextBox 10"/>
+          <p:cNvPr id="32" name="TextBox 31">
+            <a:extLst>
+              <a:ext uri="{FF2B5EF4-FFF2-40B4-BE49-F238E27FC236}">
+                <a16:creationId xmlns:a16="http://schemas.microsoft.com/office/drawing/2014/main" id="{456B2289-373E-3269-1157-F683194E3D6E}"/>
+              </a:ext>
+            </a:extLst>
+          </p:cNvPr>
           <p:cNvSpPr txBox="1"/>
           <p:nvPr/>
         </p:nvSpPr>
         <p:spPr>
           <a:xfrm>
-            <a:off x="4526280" y="2377440"/>
-            <a:ext cx="3291840" cy="320040"/>
+            <a:off x="4526280" y="4723861"/>
+            <a:ext cx="3291840" cy="292388"/>
           </a:xfrm>
           <a:prstGeom prst="rect">
             <a:avLst/>
@@ -5317,27 +5527,39 @@
           <a:p>
             <a:pPr algn="l"/>
             <a:r>
-              <a:rPr sz="1300" b="1">
+              <a:rPr lang="en-US" sz="1300" b="1" dirty="0">
                 <a:solidFill>
                   <a:srgbClr val="FFFFFF"/>
                 </a:solidFill>
                 <a:latin typeface="Calibri"/>
               </a:rPr>
-              <a:t>ER Cases Handled</a:t>
-            </a:r>
-          </a:p>
-        </p:txBody>
-      </p:sp>
-      <p:sp>
-        <p:nvSpPr>
-          <p:cNvPr id="12" name="TextBox 11"/>
+              <a:t>Off-boarding Cases</a:t>
+            </a:r>
+            <a:endParaRPr sz="1300" b="1" dirty="0">
+              <a:solidFill>
+                <a:srgbClr val="FFFFFF"/>
+              </a:solidFill>
+              <a:latin typeface="Calibri"/>
+            </a:endParaRPr>
+          </a:p>
+        </p:txBody>
+      </p:sp>
+      <p:sp>
+        <p:nvSpPr>
+          <p:cNvPr id="33" name="TextBox 32">
+            <a:extLst>
+              <a:ext uri="{FF2B5EF4-FFF2-40B4-BE49-F238E27FC236}">
+                <a16:creationId xmlns:a16="http://schemas.microsoft.com/office/drawing/2014/main" id="{8D09DFCD-E84D-3010-704A-05A0D47BC73C}"/>
+              </a:ext>
+            </a:extLst>
+          </p:cNvPr>
           <p:cNvSpPr txBox="1"/>
           <p:nvPr/>
         </p:nvSpPr>
         <p:spPr>
           <a:xfrm>
-            <a:off x="4526280" y="2706624"/>
-            <a:ext cx="3291840" cy="502920"/>
+            <a:off x="4526280" y="5044578"/>
+            <a:ext cx="3291840" cy="261610"/>
           </a:xfrm>
           <a:prstGeom prst="rect">
             <a:avLst/>
@@ -5355,27 +5577,38 @@
           <a:p>
             <a:pPr algn="l"/>
             <a:r>
-              <a:rPr sz="1100" b="0">
+              <a:rPr lang="en-US" sz="1100" b="1" dirty="0">
                 <a:solidFill>
                   <a:srgbClr val="B0BEC5"/>
                 </a:solidFill>
                 <a:latin typeface="Calibri"/>
               </a:rPr>
-              <a:t>Managed and resolved 50
-employee relations cases</a:t>
-            </a:r>
-          </a:p>
-        </p:txBody>
-      </p:sp>
-      <p:sp>
-        <p:nvSpPr>
-          <p:cNvPr id="13" name="Rectangle 12"/>
+              <a:t>94% Handled completely and assets claimed.</a:t>
+            </a:r>
+            <a:endParaRPr sz="1100" b="1" dirty="0">
+              <a:solidFill>
+                <a:srgbClr val="B0BEC5"/>
+              </a:solidFill>
+              <a:latin typeface="Calibri"/>
+            </a:endParaRPr>
+          </a:p>
+        </p:txBody>
+      </p:sp>
+      <p:sp>
+        <p:nvSpPr>
+          <p:cNvPr id="34" name="Rectangle 33">
+            <a:extLst>
+              <a:ext uri="{FF2B5EF4-FFF2-40B4-BE49-F238E27FC236}">
+                <a16:creationId xmlns:a16="http://schemas.microsoft.com/office/drawing/2014/main" id="{CDA46230-DC2E-188D-148D-4C3DCDED6DF4}"/>
+              </a:ext>
+            </a:extLst>
+          </p:cNvPr>
           <p:cNvSpPr/>
           <p:nvPr/>
         </p:nvSpPr>
         <p:spPr>
           <a:xfrm>
-            <a:off x="8229600" y="1481328"/>
+            <a:off x="8229600" y="3946287"/>
             <a:ext cx="3657600" cy="1920240"/>
           </a:xfrm>
           <a:prstGeom prst="rect">
@@ -5409,19 +5642,26 @@
           <a:lstStyle/>
           <a:p>
             <a:pPr algn="ctr"/>
-          </a:p>
-        </p:txBody>
-      </p:sp>
-      <p:sp>
-        <p:nvSpPr>
-          <p:cNvPr id="14" name="TextBox 13"/>
+            <a:endParaRPr/>
+          </a:p>
+        </p:txBody>
+      </p:sp>
+      <p:sp>
+        <p:nvSpPr>
+          <p:cNvPr id="35" name="TextBox 34">
+            <a:extLst>
+              <a:ext uri="{FF2B5EF4-FFF2-40B4-BE49-F238E27FC236}">
+                <a16:creationId xmlns:a16="http://schemas.microsoft.com/office/drawing/2014/main" id="{CC4929F9-2E27-D687-400D-C622CC1B374B}"/>
+              </a:ext>
+            </a:extLst>
+          </p:cNvPr>
           <p:cNvSpPr txBox="1"/>
           <p:nvPr/>
         </p:nvSpPr>
         <p:spPr>
           <a:xfrm>
-            <a:off x="8412480" y="1572768"/>
-            <a:ext cx="3291840" cy="868680"/>
+            <a:off x="8412480" y="3961524"/>
+            <a:ext cx="3291840" cy="923330"/>
           </a:xfrm>
           <a:prstGeom prst="rect">
             <a:avLst/>
@@ -5439,26 +5679,38 @@
           <a:p>
             <a:pPr algn="l"/>
             <a:r>
-              <a:rPr sz="5400" b="1">
+              <a:rPr lang="en-US" sz="5400" b="1" dirty="0">
                 <a:solidFill>
                   <a:srgbClr val="F5C430"/>
                 </a:solidFill>
                 <a:latin typeface="Calibri"/>
               </a:rPr>
-              <a:t>3</a:t>
-            </a:r>
-          </a:p>
-        </p:txBody>
-      </p:sp>
-      <p:sp>
-        <p:nvSpPr>
-          <p:cNvPr id="15" name="TextBox 14"/>
+              <a:t>8</a:t>
+            </a:r>
+            <a:endParaRPr sz="5400" b="1" dirty="0">
+              <a:solidFill>
+                <a:srgbClr val="F5C430"/>
+              </a:solidFill>
+              <a:latin typeface="Calibri"/>
+            </a:endParaRPr>
+          </a:p>
+        </p:txBody>
+      </p:sp>
+      <p:sp>
+        <p:nvSpPr>
+          <p:cNvPr id="36" name="TextBox 35">
+            <a:extLst>
+              <a:ext uri="{FF2B5EF4-FFF2-40B4-BE49-F238E27FC236}">
+                <a16:creationId xmlns:a16="http://schemas.microsoft.com/office/drawing/2014/main" id="{914E7A64-7E61-F7EA-FEF5-3FE4D2E46FCE}"/>
+              </a:ext>
+            </a:extLst>
+          </p:cNvPr>
           <p:cNvSpPr txBox="1"/>
           <p:nvPr/>
         </p:nvSpPr>
         <p:spPr>
           <a:xfrm>
-            <a:off x="8412480" y="2377440"/>
+            <a:off x="8412480" y="4723861"/>
             <a:ext cx="3291840" cy="320040"/>
           </a:xfrm>
           <a:prstGeom prst="rect">
@@ -5477,7 +5729,7 @@
           <a:p>
             <a:pPr algn="l"/>
             <a:r>
-              <a:rPr sz="1300" b="1">
+              <a:rPr sz="1300" b="1" dirty="0">
                 <a:solidFill>
                   <a:srgbClr val="FFFFFF"/>
                 </a:solidFill>
@@ -5490,14 +5742,20 @@
       </p:sp>
       <p:sp>
         <p:nvSpPr>
-          <p:cNvPr id="16" name="TextBox 15"/>
+          <p:cNvPr id="37" name="TextBox 36">
+            <a:extLst>
+              <a:ext uri="{FF2B5EF4-FFF2-40B4-BE49-F238E27FC236}">
+                <a16:creationId xmlns:a16="http://schemas.microsoft.com/office/drawing/2014/main" id="{8372EB82-3E4D-5527-73B4-92ABEDF552A9}"/>
+              </a:ext>
+            </a:extLst>
+          </p:cNvPr>
           <p:cNvSpPr txBox="1"/>
           <p:nvPr/>
         </p:nvSpPr>
         <p:spPr>
           <a:xfrm>
-            <a:off x="8412480" y="2706624"/>
-            <a:ext cx="3291840" cy="502920"/>
+            <a:off x="8412480" y="5010710"/>
+            <a:ext cx="3291840" cy="600164"/>
           </a:xfrm>
           <a:prstGeom prst="rect">
             <a:avLst/>
@@ -5515,28 +5773,94 @@
           <a:p>
             <a:pPr algn="l"/>
             <a:r>
-              <a:rPr sz="1100" b="0">
+              <a:rPr sz="1100" b="1" dirty="0">
                 <a:solidFill>
                   <a:srgbClr val="B0BEC5"/>
                 </a:solidFill>
                 <a:latin typeface="Calibri"/>
               </a:rPr>
-              <a:t>1 social insurance investigation
-2 re-hire violation cases resolved</a:t>
-            </a:r>
-          </a:p>
-        </p:txBody>
-      </p:sp>
-      <p:sp>
-        <p:nvSpPr>
-          <p:cNvPr id="17" name="Rectangle 16"/>
+              <a:t>1 social insurance investigatio</a:t>
+            </a:r>
+            <a:r>
+              <a:rPr lang="en-US" sz="1100" b="1" dirty="0">
+                <a:solidFill>
+                  <a:srgbClr val="B0BEC5"/>
+                </a:solidFill>
+                <a:latin typeface="Calibri"/>
+              </a:rPr>
+              <a:t>n.</a:t>
+            </a:r>
+            <a:r>
+              <a:rPr sz="1100" b="1" dirty="0">
+                <a:solidFill>
+                  <a:srgbClr val="B0BEC5"/>
+                </a:solidFill>
+                <a:latin typeface="Calibri"/>
+              </a:rPr>
+              <a:t>
+</a:t>
+            </a:r>
+            <a:r>
+              <a:rPr lang="en-US" sz="1100" b="1" dirty="0">
+                <a:solidFill>
+                  <a:srgbClr val="B0BEC5"/>
+                </a:solidFill>
+                <a:latin typeface="Calibri"/>
+              </a:rPr>
+              <a:t>3</a:t>
+            </a:r>
+            <a:r>
+              <a:rPr sz="1100" b="1" dirty="0">
+                <a:solidFill>
+                  <a:srgbClr val="B0BEC5"/>
+                </a:solidFill>
+                <a:latin typeface="Calibri"/>
+              </a:rPr>
+              <a:t> re-hire violation cases resolved</a:t>
+            </a:r>
+            <a:endParaRPr lang="en-US" sz="1100" b="1" dirty="0">
+              <a:solidFill>
+                <a:srgbClr val="B0BEC5"/>
+              </a:solidFill>
+              <a:latin typeface="Calibri"/>
+            </a:endParaRPr>
+          </a:p>
+          <a:p>
+            <a:pPr algn="l"/>
+            <a:r>
+              <a:rPr lang="en-US" sz="1100" b="1" dirty="0">
+                <a:solidFill>
+                  <a:srgbClr val="B0BEC5"/>
+                </a:solidFill>
+                <a:latin typeface="Calibri"/>
+              </a:rPr>
+              <a:t>5 ER &amp; Conflict Cases</a:t>
+            </a:r>
+            <a:endParaRPr sz="1100" b="1" dirty="0">
+              <a:solidFill>
+                <a:srgbClr val="B0BEC5"/>
+              </a:solidFill>
+              <a:latin typeface="Calibri"/>
+            </a:endParaRPr>
+          </a:p>
+        </p:txBody>
+      </p:sp>
+      <p:sp>
+        <p:nvSpPr>
+          <p:cNvPr id="38" name="Rectangle 37">
+            <a:extLst>
+              <a:ext uri="{FF2B5EF4-FFF2-40B4-BE49-F238E27FC236}">
+                <a16:creationId xmlns:a16="http://schemas.microsoft.com/office/drawing/2014/main" id="{6C317E30-D0AD-1840-9F8D-40B3A811E8A2}"/>
+              </a:ext>
+            </a:extLst>
+          </p:cNvPr>
           <p:cNvSpPr/>
           <p:nvPr/>
         </p:nvSpPr>
         <p:spPr>
           <a:xfrm>
-            <a:off x="457200" y="3611880"/>
-            <a:ext cx="5623560" cy="2880360"/>
+            <a:off x="2208212" y="1806096"/>
+            <a:ext cx="3657600" cy="1920240"/>
           </a:xfrm>
           <a:prstGeom prst="rect">
             <a:avLst/>
@@ -5569,135 +5893,26 @@
           <a:lstStyle/>
           <a:p>
             <a:pPr algn="ctr"/>
-          </a:p>
-        </p:txBody>
-      </p:sp>
-      <p:sp>
-        <p:nvSpPr>
-          <p:cNvPr id="18" name="TextBox 17"/>
-          <p:cNvSpPr txBox="1"/>
-          <p:nvPr/>
-        </p:nvSpPr>
-        <p:spPr>
-          <a:xfrm>
-            <a:off x="640080" y="3703320"/>
-            <a:ext cx="5212080" cy="777240"/>
-          </a:xfrm>
-          <a:prstGeom prst="rect">
-            <a:avLst/>
-          </a:prstGeom>
-          <a:noFill/>
-          <a:ln>
-            <a:noFill/>
-          </a:ln>
-        </p:spPr>
-        <p:txBody>
-          <a:bodyPr wrap="square">
-            <a:spAutoFit/>
-          </a:bodyPr>
-          <a:lstStyle/>
-          <a:p>
-            <a:pPr algn="l"/>
-            <a:r>
-              <a:rPr sz="4600" b="1">
-                <a:solidFill>
-                  <a:srgbClr val="F5C430"/>
-                </a:solidFill>
-                <a:latin typeface="Calibri"/>
-              </a:rPr>
-              <a:t>3</a:t>
-            </a:r>
-          </a:p>
-        </p:txBody>
-      </p:sp>
-      <p:sp>
-        <p:nvSpPr>
-          <p:cNvPr id="19" name="TextBox 18"/>
-          <p:cNvSpPr txBox="1"/>
-          <p:nvPr/>
-        </p:nvSpPr>
-        <p:spPr>
-          <a:xfrm>
-            <a:off x="640080" y="4407408"/>
-            <a:ext cx="5212080" cy="347472"/>
-          </a:xfrm>
-          <a:prstGeom prst="rect">
-            <a:avLst/>
-          </a:prstGeom>
-          <a:noFill/>
-          <a:ln>
-            <a:noFill/>
-          </a:ln>
-        </p:spPr>
-        <p:txBody>
-          <a:bodyPr wrap="square">
-            <a:spAutoFit/>
-          </a:bodyPr>
-          <a:lstStyle/>
-          <a:p>
-            <a:pPr algn="l"/>
-            <a:r>
-              <a:rPr sz="1400" b="1">
-                <a:solidFill>
-                  <a:srgbClr val="FFFFFF"/>
-                </a:solidFill>
-                <a:latin typeface="Calibri"/>
-              </a:rPr>
-              <a:t>HR Systems Built &amp; Automated</a:t>
-            </a:r>
-          </a:p>
-        </p:txBody>
-      </p:sp>
-      <p:sp>
-        <p:nvSpPr>
-          <p:cNvPr id="20" name="TextBox 19"/>
-          <p:cNvSpPr txBox="1"/>
-          <p:nvPr/>
-        </p:nvSpPr>
-        <p:spPr>
-          <a:xfrm>
-            <a:off x="640080" y="4773168"/>
-            <a:ext cx="5212080" cy="1463040"/>
-          </a:xfrm>
-          <a:prstGeom prst="rect">
-            <a:avLst/>
-          </a:prstGeom>
-          <a:noFill/>
-          <a:ln>
-            <a:noFill/>
-          </a:ln>
-        </p:spPr>
-        <p:txBody>
-          <a:bodyPr wrap="square">
-            <a:spAutoFit/>
-          </a:bodyPr>
-          <a:lstStyle/>
-          <a:p>
-            <a:pPr algn="l"/>
-            <a:r>
-              <a:rPr sz="1200" b="0">
-                <a:solidFill>
-                  <a:srgbClr val="B0BEC5"/>
-                </a:solidFill>
-                <a:latin typeface="Calibri"/>
-              </a:rPr>
-              <a:t>• Leave Email Automation (Lark integration)
-• Attendance &amp; HC Dashboard
-• Live Quiz System (600+ concurrent players)</a:t>
-            </a:r>
-          </a:p>
-        </p:txBody>
-      </p:sp>
-      <p:sp>
-        <p:nvSpPr>
-          <p:cNvPr id="21" name="Rectangle 20"/>
+            <a:endParaRPr/>
+          </a:p>
+        </p:txBody>
+      </p:sp>
+      <p:sp>
+        <p:nvSpPr>
+          <p:cNvPr id="39" name="Rectangle 38">
+            <a:extLst>
+              <a:ext uri="{FF2B5EF4-FFF2-40B4-BE49-F238E27FC236}">
+                <a16:creationId xmlns:a16="http://schemas.microsoft.com/office/drawing/2014/main" id="{4D8CB112-8574-E028-21AA-004ECFF4397A}"/>
+              </a:ext>
+            </a:extLst>
+          </p:cNvPr>
           <p:cNvSpPr/>
           <p:nvPr/>
         </p:nvSpPr>
         <p:spPr>
           <a:xfrm>
-            <a:off x="6446520" y="3611880"/>
-            <a:ext cx="5623560" cy="2880360"/>
+            <a:off x="6094412" y="1806096"/>
+            <a:ext cx="3657600" cy="1920240"/>
           </a:xfrm>
           <a:prstGeom prst="rect">
             <a:avLst/>
@@ -5730,19 +5945,26 @@
           <a:lstStyle/>
           <a:p>
             <a:pPr algn="ctr"/>
-          </a:p>
-        </p:txBody>
-      </p:sp>
-      <p:sp>
-        <p:nvSpPr>
-          <p:cNvPr id="22" name="TextBox 21"/>
+            <a:endParaRPr/>
+          </a:p>
+        </p:txBody>
+      </p:sp>
+      <p:sp>
+        <p:nvSpPr>
+          <p:cNvPr id="40" name="TextBox 39">
+            <a:extLst>
+              <a:ext uri="{FF2B5EF4-FFF2-40B4-BE49-F238E27FC236}">
+                <a16:creationId xmlns:a16="http://schemas.microsoft.com/office/drawing/2014/main" id="{785FF52E-42E3-1937-C25D-FCA5CA4B29B6}"/>
+              </a:ext>
+            </a:extLst>
+          </p:cNvPr>
           <p:cNvSpPr txBox="1"/>
           <p:nvPr/>
         </p:nvSpPr>
         <p:spPr>
           <a:xfrm>
-            <a:off x="6629400" y="3703320"/>
-            <a:ext cx="5212080" cy="777240"/>
+            <a:off x="6199504" y="2277453"/>
+            <a:ext cx="3520440" cy="707886"/>
           </a:xfrm>
           <a:prstGeom prst="rect">
             <a:avLst/>
@@ -5760,27 +5982,33 @@
           <a:p>
             <a:pPr algn="l"/>
             <a:r>
-              <a:rPr sz="4600" b="1">
+              <a:rPr lang="en-US" sz="2000" b="1" dirty="0">
                 <a:solidFill>
                   <a:srgbClr val="F5C430"/>
                 </a:solidFill>
                 <a:latin typeface="Calibri"/>
               </a:rPr>
-              <a:t>1</a:t>
-            </a:r>
-          </a:p>
-        </p:txBody>
-      </p:sp>
-      <p:sp>
-        <p:nvSpPr>
-          <p:cNvPr id="23" name="TextBox 22"/>
+              <a:t>Frequently checking the active employees.</a:t>
+            </a:r>
+          </a:p>
+        </p:txBody>
+      </p:sp>
+      <p:sp>
+        <p:nvSpPr>
+          <p:cNvPr id="41" name="TextBox 40">
+            <a:extLst>
+              <a:ext uri="{FF2B5EF4-FFF2-40B4-BE49-F238E27FC236}">
+                <a16:creationId xmlns:a16="http://schemas.microsoft.com/office/drawing/2014/main" id="{E937D981-ABB9-119B-0972-69D4944BDA3F}"/>
+              </a:ext>
+            </a:extLst>
+          </p:cNvPr>
           <p:cNvSpPr txBox="1"/>
           <p:nvPr/>
         </p:nvSpPr>
         <p:spPr>
           <a:xfrm>
-            <a:off x="6629400" y="4407408"/>
-            <a:ext cx="5212080" cy="347472"/>
+            <a:off x="6199504" y="1957192"/>
+            <a:ext cx="3291840" cy="369332"/>
           </a:xfrm>
           <a:prstGeom prst="rect">
             <a:avLst/>
@@ -5798,27 +6026,39 @@
           <a:p>
             <a:pPr algn="l"/>
             <a:r>
-              <a:rPr sz="1400" b="1">
+              <a:rPr lang="en-US" b="1" dirty="0">
                 <a:solidFill>
                   <a:srgbClr val="FFFFFF"/>
                 </a:solidFill>
                 <a:latin typeface="Calibri"/>
               </a:rPr>
-              <a:t>Major Initiative In Progress</a:t>
-            </a:r>
-          </a:p>
-        </p:txBody>
-      </p:sp>
-      <p:sp>
-        <p:nvSpPr>
-          <p:cNvPr id="24" name="TextBox 23"/>
+              <a:t>Regular Review of the HC</a:t>
+            </a:r>
+            <a:endParaRPr b="1" dirty="0">
+              <a:solidFill>
+                <a:srgbClr val="FFFFFF"/>
+              </a:solidFill>
+              <a:latin typeface="Calibri"/>
+            </a:endParaRPr>
+          </a:p>
+        </p:txBody>
+      </p:sp>
+      <p:sp>
+        <p:nvSpPr>
+          <p:cNvPr id="42" name="TextBox 41">
+            <a:extLst>
+              <a:ext uri="{FF2B5EF4-FFF2-40B4-BE49-F238E27FC236}">
+                <a16:creationId xmlns:a16="http://schemas.microsoft.com/office/drawing/2014/main" id="{8C53CD4F-D39C-362D-6C7A-62532048667A}"/>
+              </a:ext>
+            </a:extLst>
+          </p:cNvPr>
           <p:cNvSpPr txBox="1"/>
           <p:nvPr/>
         </p:nvSpPr>
         <p:spPr>
           <a:xfrm>
-            <a:off x="6629400" y="4773168"/>
-            <a:ext cx="5212080" cy="1463040"/>
+            <a:off x="6199504" y="2997052"/>
+            <a:ext cx="3291840" cy="430887"/>
           </a:xfrm>
           <a:prstGeom prst="rect">
             <a:avLst/>
@@ -5836,18 +6076,210 @@
           <a:p>
             <a:pPr algn="l"/>
             <a:r>
-              <a:rPr sz="1200" b="0">
+              <a:rPr lang="en-US" sz="1100" b="1" dirty="0">
                 <a:solidFill>
                   <a:srgbClr val="B0BEC5"/>
                 </a:solidFill>
                 <a:latin typeface="Calibri"/>
               </a:rPr>
-              <a:t>iTalent ESS Portal — transitioning leave management
-from email to fully digital self-service system</a:t>
-            </a:r>
-          </a:p>
-        </p:txBody>
-      </p:sp>
+              <a:t>To avoid the previous issues of extra payments, open CRMs, &amp; Un-collected assets.</a:t>
+            </a:r>
+            <a:endParaRPr sz="1100" b="1" dirty="0">
+              <a:solidFill>
+                <a:srgbClr val="B0BEC5"/>
+              </a:solidFill>
+              <a:latin typeface="Calibri"/>
+            </a:endParaRPr>
+          </a:p>
+        </p:txBody>
+      </p:sp>
+      <p:sp>
+        <p:nvSpPr>
+          <p:cNvPr id="47" name="TextBox 46">
+            <a:extLst>
+              <a:ext uri="{FF2B5EF4-FFF2-40B4-BE49-F238E27FC236}">
+                <a16:creationId xmlns:a16="http://schemas.microsoft.com/office/drawing/2014/main" id="{A70A8F1D-2466-4370-9558-65BEAB1A5FB9}"/>
+              </a:ext>
+            </a:extLst>
+          </p:cNvPr>
+          <p:cNvSpPr txBox="1"/>
+          <p:nvPr/>
+        </p:nvSpPr>
+        <p:spPr>
+          <a:xfrm>
+            <a:off x="2391092" y="2006175"/>
+            <a:ext cx="3291840" cy="400110"/>
+          </a:xfrm>
+          <a:prstGeom prst="rect">
+            <a:avLst/>
+          </a:prstGeom>
+          <a:noFill/>
+          <a:ln>
+            <a:noFill/>
+          </a:ln>
+        </p:spPr>
+        <p:txBody>
+          <a:bodyPr wrap="square">
+            <a:spAutoFit/>
+          </a:bodyPr>
+          <a:lstStyle/>
+          <a:p>
+            <a:pPr algn="l"/>
+            <a:r>
+              <a:rPr lang="en-US" sz="2000" b="1" dirty="0">
+                <a:solidFill>
+                  <a:srgbClr val="F5C430"/>
+                </a:solidFill>
+                <a:latin typeface="Calibri"/>
+              </a:rPr>
+              <a:t>5 AI projects &amp; Tools Created</a:t>
+            </a:r>
+          </a:p>
+        </p:txBody>
+      </p:sp>
+      <p:sp>
+        <p:nvSpPr>
+          <p:cNvPr id="48" name="TextBox 47">
+            <a:extLst>
+              <a:ext uri="{FF2B5EF4-FFF2-40B4-BE49-F238E27FC236}">
+                <a16:creationId xmlns:a16="http://schemas.microsoft.com/office/drawing/2014/main" id="{5FBE563D-1A48-520C-5EBF-B4902417F2EC}"/>
+              </a:ext>
+            </a:extLst>
+          </p:cNvPr>
+          <p:cNvSpPr txBox="1"/>
+          <p:nvPr/>
+        </p:nvSpPr>
+        <p:spPr>
+          <a:xfrm>
+            <a:off x="2468816" y="2378744"/>
+            <a:ext cx="3291840" cy="1169551"/>
+          </a:xfrm>
+          <a:prstGeom prst="rect">
+            <a:avLst/>
+          </a:prstGeom>
+          <a:noFill/>
+          <a:ln>
+            <a:noFill/>
+          </a:ln>
+        </p:spPr>
+        <p:txBody>
+          <a:bodyPr wrap="square">
+            <a:spAutoFit/>
+          </a:bodyPr>
+          <a:lstStyle/>
+          <a:p>
+            <a:pPr marL="285750" indent="-285750" algn="l">
+              <a:buFont typeface="Arial" panose="020B0604020202020204" pitchFamily="34" charset="0"/>
+              <a:buChar char="•"/>
+            </a:pPr>
+            <a:r>
+              <a:rPr lang="en-US" sz="1400" b="1" dirty="0">
+                <a:solidFill>
+                  <a:srgbClr val="FFFFFF"/>
+                </a:solidFill>
+                <a:latin typeface="Calibri"/>
+              </a:rPr>
+              <a:t>Attendance Dashboard</a:t>
+            </a:r>
+          </a:p>
+          <a:p>
+            <a:pPr marL="285750" indent="-285750" algn="l">
+              <a:buFont typeface="Arial" panose="020B0604020202020204" pitchFamily="34" charset="0"/>
+              <a:buChar char="•"/>
+            </a:pPr>
+            <a:r>
+              <a:rPr lang="en-US" sz="1400" b="1" dirty="0">
+                <a:solidFill>
+                  <a:srgbClr val="FFFFFF"/>
+                </a:solidFill>
+                <a:latin typeface="Calibri"/>
+              </a:rPr>
+              <a:t>HR Analytics Dashboard</a:t>
+            </a:r>
+          </a:p>
+          <a:p>
+            <a:pPr marL="285750" indent="-285750" algn="l">
+              <a:buFont typeface="Arial" panose="020B0604020202020204" pitchFamily="34" charset="0"/>
+              <a:buChar char="•"/>
+            </a:pPr>
+            <a:r>
+              <a:rPr lang="en-US" sz="1400" b="1" dirty="0">
+                <a:solidFill>
+                  <a:srgbClr val="FFFFFF"/>
+                </a:solidFill>
+                <a:latin typeface="Calibri"/>
+              </a:rPr>
+              <a:t>Employee Lockup tool</a:t>
+            </a:r>
+          </a:p>
+          <a:p>
+            <a:pPr marL="285750" indent="-285750" algn="l">
+              <a:buFont typeface="Arial" panose="020B0604020202020204" pitchFamily="34" charset="0"/>
+              <a:buChar char="•"/>
+            </a:pPr>
+            <a:r>
+              <a:rPr lang="en-US" sz="1400" b="1" dirty="0">
+                <a:solidFill>
+                  <a:srgbClr val="FFFFFF"/>
+                </a:solidFill>
+                <a:latin typeface="Calibri"/>
+              </a:rPr>
+              <a:t>Event Quiz Tool</a:t>
+            </a:r>
+          </a:p>
+          <a:p>
+            <a:pPr marL="285750" indent="-285750" algn="l">
+              <a:buFont typeface="Arial" panose="020B0604020202020204" pitchFamily="34" charset="0"/>
+              <a:buChar char="•"/>
+            </a:pPr>
+            <a:r>
+              <a:rPr lang="en-US" sz="1400" b="1" dirty="0">
+                <a:solidFill>
+                  <a:srgbClr val="FFFFFF"/>
+                </a:solidFill>
+                <a:latin typeface="Calibri"/>
+              </a:rPr>
+              <a:t>Event Lucky Draw Tool</a:t>
+            </a:r>
+            <a:endParaRPr sz="1400" b="1" dirty="0">
+              <a:solidFill>
+                <a:srgbClr val="FFFFFF"/>
+              </a:solidFill>
+              <a:latin typeface="Calibri"/>
+            </a:endParaRPr>
+          </a:p>
+        </p:txBody>
+      </p:sp>
+      <p:pic>
+        <p:nvPicPr>
+          <p:cNvPr id="50" name="Picture 49">
+            <a:extLst>
+              <a:ext uri="{FF2B5EF4-FFF2-40B4-BE49-F238E27FC236}">
+                <a16:creationId xmlns:a16="http://schemas.microsoft.com/office/drawing/2014/main" id="{36DC7E56-2129-68B0-97C0-51CA43A562B6}"/>
+              </a:ext>
+            </a:extLst>
+          </p:cNvPr>
+          <p:cNvPicPr>
+            <a:picLocks noChangeAspect="1"/>
+          </p:cNvPicPr>
+          <p:nvPr/>
+        </p:nvPicPr>
+        <p:blipFill>
+          <a:blip r:embed="rId2"/>
+          <a:stretch>
+            <a:fillRect/>
+          </a:stretch>
+        </p:blipFill>
+        <p:spPr>
+          <a:xfrm>
+            <a:off x="10945933" y="205308"/>
+            <a:ext cx="968134" cy="935736"/>
+          </a:xfrm>
+          <a:prstGeom prst="rect">
+            <a:avLst/>
+          </a:prstGeom>
+        </p:spPr>
+      </p:pic>
     </p:spTree>
   </p:cSld>
   <p:clrMapOvr>
@@ -5857,7 +6289,1232 @@
 </file>
 
 <file path=ppt/slides/slide4.xml><?xml version="1.0" encoding="utf-8"?>
-<p:sld xmlns:a="http://schemas.openxmlformats.org/drawingml/2006/main" xmlns:p="http://schemas.openxmlformats.org/presentationml/2006/main" xmlns:r="http://schemas.openxmlformats.org/officeDocument/2006/relationships">
+<p:sld xmlns:a="http://schemas.openxmlformats.org/drawingml/2006/main" xmlns:r="http://schemas.openxmlformats.org/officeDocument/2006/relationships" xmlns:p="http://schemas.openxmlformats.org/presentationml/2006/main">
+  <p:cSld>
+    <p:bg>
+      <p:bgPr>
+        <a:solidFill>
+          <a:srgbClr val="1B2A5C"/>
+        </a:solidFill>
+        <a:effectLst/>
+      </p:bgPr>
+    </p:bg>
+    <p:spTree>
+      <p:nvGrpSpPr>
+        <p:cNvPr id="1" name="">
+          <a:extLst>
+            <a:ext uri="{FF2B5EF4-FFF2-40B4-BE49-F238E27FC236}">
+              <a16:creationId xmlns:a16="http://schemas.microsoft.com/office/drawing/2014/main" id="{79AAA331-CBBE-7082-D8AD-4F47385FE10C}"/>
+            </a:ext>
+          </a:extLst>
+        </p:cNvPr>
+        <p:cNvGrpSpPr/>
+        <p:nvPr/>
+      </p:nvGrpSpPr>
+      <p:grpSpPr>
+        <a:xfrm>
+          <a:off x="0" y="0"/>
+          <a:ext cx="0" cy="0"/>
+          <a:chOff x="0" y="0"/>
+          <a:chExt cx="0" cy="0"/>
+        </a:xfrm>
+      </p:grpSpPr>
+      <p:sp>
+        <p:nvSpPr>
+          <p:cNvPr id="2" name="TextBox 1">
+            <a:extLst>
+              <a:ext uri="{FF2B5EF4-FFF2-40B4-BE49-F238E27FC236}">
+                <a16:creationId xmlns:a16="http://schemas.microsoft.com/office/drawing/2014/main" id="{82258403-A415-82DD-4C43-D12EF3225B64}"/>
+              </a:ext>
+            </a:extLst>
+          </p:cNvPr>
+          <p:cNvSpPr txBox="1"/>
+          <p:nvPr/>
+        </p:nvSpPr>
+        <p:spPr>
+          <a:xfrm>
+            <a:off x="457200" y="201168"/>
+            <a:ext cx="4572000" cy="347472"/>
+          </a:xfrm>
+          <a:prstGeom prst="rect">
+            <a:avLst/>
+          </a:prstGeom>
+          <a:noFill/>
+          <a:ln>
+            <a:noFill/>
+          </a:ln>
+        </p:spPr>
+        <p:txBody>
+          <a:bodyPr wrap="square">
+            <a:spAutoFit/>
+          </a:bodyPr>
+          <a:lstStyle/>
+          <a:p>
+            <a:pPr algn="l"/>
+            <a:r>
+              <a:rPr sz="1100" b="1">
+                <a:solidFill>
+                  <a:srgbClr val="F5C430"/>
+                </a:solidFill>
+                <a:latin typeface="Calibri"/>
+              </a:rPr>
+              <a:t>02  /  Performance Summary</a:t>
+            </a:r>
+          </a:p>
+        </p:txBody>
+      </p:sp>
+      <p:sp>
+        <p:nvSpPr>
+          <p:cNvPr id="4" name="Rectangle 3">
+            <a:extLst>
+              <a:ext uri="{FF2B5EF4-FFF2-40B4-BE49-F238E27FC236}">
+                <a16:creationId xmlns:a16="http://schemas.microsoft.com/office/drawing/2014/main" id="{7D1EBB3C-A3A3-0457-9436-CB58596572DC}"/>
+              </a:ext>
+            </a:extLst>
+          </p:cNvPr>
+          <p:cNvSpPr/>
+          <p:nvPr/>
+        </p:nvSpPr>
+        <p:spPr>
+          <a:xfrm>
+            <a:off x="457200" y="1298448"/>
+            <a:ext cx="11274552" cy="38100"/>
+          </a:xfrm>
+          <a:prstGeom prst="rect">
+            <a:avLst/>
+          </a:prstGeom>
+          <a:solidFill>
+            <a:srgbClr val="F5C430"/>
+          </a:solidFill>
+          <a:ln>
+            <a:noFill/>
+          </a:ln>
+        </p:spPr>
+        <p:style>
+          <a:lnRef idx="1">
+            <a:schemeClr val="accent1"/>
+          </a:lnRef>
+          <a:fillRef idx="3">
+            <a:schemeClr val="accent1"/>
+          </a:fillRef>
+          <a:effectRef idx="2">
+            <a:schemeClr val="accent1"/>
+          </a:effectRef>
+          <a:fontRef idx="minor">
+            <a:schemeClr val="lt1"/>
+          </a:fontRef>
+        </p:style>
+        <p:txBody>
+          <a:bodyPr rtlCol="0" anchor="ctr"/>
+          <a:lstStyle/>
+          <a:p>
+            <a:pPr algn="ctr"/>
+            <a:endParaRPr/>
+          </a:p>
+        </p:txBody>
+      </p:sp>
+      <p:sp>
+        <p:nvSpPr>
+          <p:cNvPr id="5" name="Rectangle 4">
+            <a:extLst>
+              <a:ext uri="{FF2B5EF4-FFF2-40B4-BE49-F238E27FC236}">
+                <a16:creationId xmlns:a16="http://schemas.microsoft.com/office/drawing/2014/main" id="{09B46CF7-513E-9F27-B86A-CD2DE3D9D718}"/>
+              </a:ext>
+            </a:extLst>
+          </p:cNvPr>
+          <p:cNvSpPr/>
+          <p:nvPr/>
+        </p:nvSpPr>
+        <p:spPr>
+          <a:xfrm>
+            <a:off x="2514600" y="3902845"/>
+            <a:ext cx="3657600" cy="1920240"/>
+          </a:xfrm>
+          <a:prstGeom prst="rect">
+            <a:avLst/>
+          </a:prstGeom>
+          <a:solidFill>
+            <a:srgbClr val="162044"/>
+          </a:solidFill>
+          <a:ln w="12700">
+            <a:solidFill>
+              <a:srgbClr val="F5C430"/>
+            </a:solidFill>
+          </a:ln>
+        </p:spPr>
+        <p:style>
+          <a:lnRef idx="1">
+            <a:schemeClr val="accent1"/>
+          </a:lnRef>
+          <a:fillRef idx="3">
+            <a:schemeClr val="accent1"/>
+          </a:fillRef>
+          <a:effectRef idx="2">
+            <a:schemeClr val="accent1"/>
+          </a:effectRef>
+          <a:fontRef idx="minor">
+            <a:schemeClr val="lt1"/>
+          </a:fontRef>
+        </p:style>
+        <p:txBody>
+          <a:bodyPr rtlCol="0" anchor="ctr"/>
+          <a:lstStyle/>
+          <a:p>
+            <a:pPr algn="ctr"/>
+            <a:endParaRPr/>
+          </a:p>
+        </p:txBody>
+      </p:sp>
+      <p:sp>
+        <p:nvSpPr>
+          <p:cNvPr id="8" name="TextBox 7">
+            <a:extLst>
+              <a:ext uri="{FF2B5EF4-FFF2-40B4-BE49-F238E27FC236}">
+                <a16:creationId xmlns:a16="http://schemas.microsoft.com/office/drawing/2014/main" id="{5A52031C-7F19-6596-2F3C-6E2621885D79}"/>
+              </a:ext>
+            </a:extLst>
+          </p:cNvPr>
+          <p:cNvSpPr txBox="1"/>
+          <p:nvPr/>
+        </p:nvSpPr>
+        <p:spPr>
+          <a:xfrm>
+            <a:off x="2638213" y="4769782"/>
+            <a:ext cx="3291840" cy="430887"/>
+          </a:xfrm>
+          <a:prstGeom prst="rect">
+            <a:avLst/>
+          </a:prstGeom>
+          <a:noFill/>
+          <a:ln>
+            <a:noFill/>
+          </a:ln>
+        </p:spPr>
+        <p:txBody>
+          <a:bodyPr wrap="square">
+            <a:spAutoFit/>
+          </a:bodyPr>
+          <a:lstStyle/>
+          <a:p>
+            <a:pPr algn="l"/>
+            <a:r>
+              <a:rPr lang="en-US" sz="1100" b="0" dirty="0">
+                <a:solidFill>
+                  <a:srgbClr val="B0BEC5"/>
+                </a:solidFill>
+                <a:latin typeface="Calibri"/>
+              </a:rPr>
+              <a:t>Avoided the cost of the quiz management tools for 300+ attendees.</a:t>
+            </a:r>
+            <a:endParaRPr sz="1100" b="0" dirty="0">
+              <a:solidFill>
+                <a:srgbClr val="B0BEC5"/>
+              </a:solidFill>
+              <a:latin typeface="Calibri"/>
+            </a:endParaRPr>
+          </a:p>
+        </p:txBody>
+      </p:sp>
+      <p:sp>
+        <p:nvSpPr>
+          <p:cNvPr id="9" name="Rectangle 8">
+            <a:extLst>
+              <a:ext uri="{FF2B5EF4-FFF2-40B4-BE49-F238E27FC236}">
+                <a16:creationId xmlns:a16="http://schemas.microsoft.com/office/drawing/2014/main" id="{60772C1C-4C57-6BAB-6C86-AEB2D6FFB777}"/>
+              </a:ext>
+            </a:extLst>
+          </p:cNvPr>
+          <p:cNvSpPr/>
+          <p:nvPr/>
+        </p:nvSpPr>
+        <p:spPr>
+          <a:xfrm>
+            <a:off x="6400800" y="3902845"/>
+            <a:ext cx="3657600" cy="1920240"/>
+          </a:xfrm>
+          <a:prstGeom prst="rect">
+            <a:avLst/>
+          </a:prstGeom>
+          <a:solidFill>
+            <a:srgbClr val="162044"/>
+          </a:solidFill>
+          <a:ln w="12700">
+            <a:solidFill>
+              <a:srgbClr val="F5C430"/>
+            </a:solidFill>
+          </a:ln>
+        </p:spPr>
+        <p:style>
+          <a:lnRef idx="1">
+            <a:schemeClr val="accent1"/>
+          </a:lnRef>
+          <a:fillRef idx="3">
+            <a:schemeClr val="accent1"/>
+          </a:fillRef>
+          <a:effectRef idx="2">
+            <a:schemeClr val="accent1"/>
+          </a:effectRef>
+          <a:fontRef idx="minor">
+            <a:schemeClr val="lt1"/>
+          </a:fontRef>
+        </p:style>
+        <p:txBody>
+          <a:bodyPr rtlCol="0" anchor="ctr"/>
+          <a:lstStyle/>
+          <a:p>
+            <a:pPr algn="ctr"/>
+            <a:endParaRPr/>
+          </a:p>
+        </p:txBody>
+      </p:sp>
+      <p:sp>
+        <p:nvSpPr>
+          <p:cNvPr id="12" name="TextBox 11">
+            <a:extLst>
+              <a:ext uri="{FF2B5EF4-FFF2-40B4-BE49-F238E27FC236}">
+                <a16:creationId xmlns:a16="http://schemas.microsoft.com/office/drawing/2014/main" id="{584EDA42-F394-A1EF-C7DE-A82D7C7599F2}"/>
+              </a:ext>
+            </a:extLst>
+          </p:cNvPr>
+          <p:cNvSpPr txBox="1"/>
+          <p:nvPr/>
+        </p:nvSpPr>
+        <p:spPr>
+          <a:xfrm>
+            <a:off x="6583680" y="5024860"/>
+            <a:ext cx="3291840" cy="430887"/>
+          </a:xfrm>
+          <a:prstGeom prst="rect">
+            <a:avLst/>
+          </a:prstGeom>
+          <a:noFill/>
+          <a:ln>
+            <a:noFill/>
+          </a:ln>
+        </p:spPr>
+        <p:txBody>
+          <a:bodyPr wrap="square">
+            <a:spAutoFit/>
+          </a:bodyPr>
+          <a:lstStyle/>
+          <a:p>
+            <a:pPr algn="l"/>
+            <a:r>
+              <a:rPr lang="en-US" sz="1100" dirty="0">
+                <a:solidFill>
+                  <a:srgbClr val="B0BEC5"/>
+                </a:solidFill>
+                <a:latin typeface="Calibri"/>
+              </a:rPr>
+              <a:t>Instead of using paid tools with around 50$  &amp; Avoided using free tools with inappropriate Ads.</a:t>
+            </a:r>
+            <a:endParaRPr sz="1100" b="0" dirty="0">
+              <a:solidFill>
+                <a:srgbClr val="B0BEC5"/>
+              </a:solidFill>
+              <a:latin typeface="Calibri"/>
+            </a:endParaRPr>
+          </a:p>
+        </p:txBody>
+      </p:sp>
+      <p:sp>
+        <p:nvSpPr>
+          <p:cNvPr id="26" name="Rectangle 25">
+            <a:extLst>
+              <a:ext uri="{FF2B5EF4-FFF2-40B4-BE49-F238E27FC236}">
+                <a16:creationId xmlns:a16="http://schemas.microsoft.com/office/drawing/2014/main" id="{7086AA83-1FC7-3D70-F9D8-C674D9FC4269}"/>
+              </a:ext>
+            </a:extLst>
+          </p:cNvPr>
+          <p:cNvSpPr/>
+          <p:nvPr/>
+        </p:nvSpPr>
+        <p:spPr>
+          <a:xfrm>
+            <a:off x="457200" y="1753961"/>
+            <a:ext cx="3657600" cy="1920240"/>
+          </a:xfrm>
+          <a:prstGeom prst="rect">
+            <a:avLst/>
+          </a:prstGeom>
+          <a:solidFill>
+            <a:srgbClr val="162044"/>
+          </a:solidFill>
+          <a:ln w="12700">
+            <a:solidFill>
+              <a:srgbClr val="F5C430"/>
+            </a:solidFill>
+          </a:ln>
+        </p:spPr>
+        <p:style>
+          <a:lnRef idx="1">
+            <a:schemeClr val="accent1"/>
+          </a:lnRef>
+          <a:fillRef idx="3">
+            <a:schemeClr val="accent1"/>
+          </a:fillRef>
+          <a:effectRef idx="2">
+            <a:schemeClr val="accent1"/>
+          </a:effectRef>
+          <a:fontRef idx="minor">
+            <a:schemeClr val="lt1"/>
+          </a:fontRef>
+        </p:style>
+        <p:txBody>
+          <a:bodyPr rtlCol="0" anchor="ctr"/>
+          <a:lstStyle/>
+          <a:p>
+            <a:pPr algn="ctr"/>
+            <a:endParaRPr/>
+          </a:p>
+        </p:txBody>
+      </p:sp>
+      <p:sp>
+        <p:nvSpPr>
+          <p:cNvPr id="30" name="Rectangle 29">
+            <a:extLst>
+              <a:ext uri="{FF2B5EF4-FFF2-40B4-BE49-F238E27FC236}">
+                <a16:creationId xmlns:a16="http://schemas.microsoft.com/office/drawing/2014/main" id="{A2A320E7-A7B7-824D-D424-4E4125C0CA3D}"/>
+              </a:ext>
+            </a:extLst>
+          </p:cNvPr>
+          <p:cNvSpPr/>
+          <p:nvPr/>
+        </p:nvSpPr>
+        <p:spPr>
+          <a:xfrm>
+            <a:off x="4343400" y="1753961"/>
+            <a:ext cx="3657600" cy="1920240"/>
+          </a:xfrm>
+          <a:prstGeom prst="rect">
+            <a:avLst/>
+          </a:prstGeom>
+          <a:solidFill>
+            <a:srgbClr val="162044"/>
+          </a:solidFill>
+          <a:ln w="12700">
+            <a:solidFill>
+              <a:srgbClr val="F5C430"/>
+            </a:solidFill>
+          </a:ln>
+        </p:spPr>
+        <p:style>
+          <a:lnRef idx="1">
+            <a:schemeClr val="accent1"/>
+          </a:lnRef>
+          <a:fillRef idx="3">
+            <a:schemeClr val="accent1"/>
+          </a:fillRef>
+          <a:effectRef idx="2">
+            <a:schemeClr val="accent1"/>
+          </a:effectRef>
+          <a:fontRef idx="minor">
+            <a:schemeClr val="lt1"/>
+          </a:fontRef>
+        </p:style>
+        <p:txBody>
+          <a:bodyPr rtlCol="0" anchor="ctr"/>
+          <a:lstStyle/>
+          <a:p>
+            <a:pPr algn="ctr"/>
+            <a:endParaRPr/>
+          </a:p>
+        </p:txBody>
+      </p:sp>
+      <p:sp>
+        <p:nvSpPr>
+          <p:cNvPr id="31" name="TextBox 30">
+            <a:extLst>
+              <a:ext uri="{FF2B5EF4-FFF2-40B4-BE49-F238E27FC236}">
+                <a16:creationId xmlns:a16="http://schemas.microsoft.com/office/drawing/2014/main" id="{726F22A5-8ED0-8FFD-099F-C7436B5BB378}"/>
+              </a:ext>
+            </a:extLst>
+          </p:cNvPr>
+          <p:cNvSpPr txBox="1"/>
+          <p:nvPr/>
+        </p:nvSpPr>
+        <p:spPr>
+          <a:xfrm>
+            <a:off x="4448492" y="2225318"/>
+            <a:ext cx="3291840" cy="400110"/>
+          </a:xfrm>
+          <a:prstGeom prst="rect">
+            <a:avLst/>
+          </a:prstGeom>
+          <a:noFill/>
+          <a:ln>
+            <a:noFill/>
+          </a:ln>
+        </p:spPr>
+        <p:txBody>
+          <a:bodyPr wrap="square">
+            <a:spAutoFit/>
+          </a:bodyPr>
+          <a:lstStyle/>
+          <a:p>
+            <a:pPr algn="l"/>
+            <a:r>
+              <a:rPr lang="en-US" sz="2000" b="1" dirty="0">
+                <a:solidFill>
+                  <a:srgbClr val="F5C430"/>
+                </a:solidFill>
+                <a:latin typeface="Calibri"/>
+              </a:rPr>
+              <a:t>+</a:t>
+            </a:r>
+            <a:r>
+              <a:rPr sz="2000" b="1" dirty="0">
+                <a:solidFill>
+                  <a:srgbClr val="F5C430"/>
+                </a:solidFill>
+                <a:latin typeface="Calibri"/>
+              </a:rPr>
+              <a:t>5</a:t>
+            </a:r>
+            <a:r>
+              <a:rPr lang="en-US" sz="2000" b="1" dirty="0">
+                <a:solidFill>
+                  <a:srgbClr val="F5C430"/>
+                </a:solidFill>
+                <a:latin typeface="Calibri"/>
+              </a:rPr>
+              <a:t> Hours Saved each time</a:t>
+            </a:r>
+          </a:p>
+        </p:txBody>
+      </p:sp>
+      <p:sp>
+        <p:nvSpPr>
+          <p:cNvPr id="32" name="TextBox 31">
+            <a:extLst>
+              <a:ext uri="{FF2B5EF4-FFF2-40B4-BE49-F238E27FC236}">
+                <a16:creationId xmlns:a16="http://schemas.microsoft.com/office/drawing/2014/main" id="{9445AA0F-402F-AC35-1619-C7ADC6B224BC}"/>
+              </a:ext>
+            </a:extLst>
+          </p:cNvPr>
+          <p:cNvSpPr txBox="1"/>
+          <p:nvPr/>
+        </p:nvSpPr>
+        <p:spPr>
+          <a:xfrm>
+            <a:off x="4448492" y="1905057"/>
+            <a:ext cx="3291840" cy="369332"/>
+          </a:xfrm>
+          <a:prstGeom prst="rect">
+            <a:avLst/>
+          </a:prstGeom>
+          <a:noFill/>
+          <a:ln>
+            <a:noFill/>
+          </a:ln>
+        </p:spPr>
+        <p:txBody>
+          <a:bodyPr wrap="square">
+            <a:spAutoFit/>
+          </a:bodyPr>
+          <a:lstStyle/>
+          <a:p>
+            <a:pPr algn="l"/>
+            <a:r>
+              <a:rPr lang="en-US" b="1" dirty="0">
+                <a:solidFill>
+                  <a:srgbClr val="FFFFFF"/>
+                </a:solidFill>
+                <a:latin typeface="Calibri"/>
+              </a:rPr>
+              <a:t>HR Analytics Dashboard</a:t>
+            </a:r>
+            <a:endParaRPr b="1" dirty="0">
+              <a:solidFill>
+                <a:srgbClr val="FFFFFF"/>
+              </a:solidFill>
+              <a:latin typeface="Calibri"/>
+            </a:endParaRPr>
+          </a:p>
+        </p:txBody>
+      </p:sp>
+      <p:sp>
+        <p:nvSpPr>
+          <p:cNvPr id="33" name="TextBox 32">
+            <a:extLst>
+              <a:ext uri="{FF2B5EF4-FFF2-40B4-BE49-F238E27FC236}">
+                <a16:creationId xmlns:a16="http://schemas.microsoft.com/office/drawing/2014/main" id="{61A27C92-D2C5-2EEE-52E0-C5A67D0F424C}"/>
+              </a:ext>
+            </a:extLst>
+          </p:cNvPr>
+          <p:cNvSpPr txBox="1"/>
+          <p:nvPr/>
+        </p:nvSpPr>
+        <p:spPr>
+          <a:xfrm>
+            <a:off x="4448492" y="2776988"/>
+            <a:ext cx="3291840" cy="430887"/>
+          </a:xfrm>
+          <a:prstGeom prst="rect">
+            <a:avLst/>
+          </a:prstGeom>
+          <a:noFill/>
+          <a:ln>
+            <a:noFill/>
+          </a:ln>
+        </p:spPr>
+        <p:txBody>
+          <a:bodyPr wrap="square">
+            <a:spAutoFit/>
+          </a:bodyPr>
+          <a:lstStyle/>
+          <a:p>
+            <a:pPr algn="l"/>
+            <a:r>
+              <a:rPr lang="en-US" sz="1100" b="0" dirty="0">
+                <a:solidFill>
+                  <a:srgbClr val="B0BEC5"/>
+                </a:solidFill>
+                <a:latin typeface="Calibri"/>
+              </a:rPr>
+              <a:t>The full dashboard now runs in </a:t>
+            </a:r>
+            <a:r>
+              <a:rPr lang="en-US" sz="1100" dirty="0">
+                <a:solidFill>
+                  <a:srgbClr val="B0BEC5"/>
+                </a:solidFill>
+                <a:latin typeface="Calibri"/>
+              </a:rPr>
+              <a:t>less than 1 minute which gives immediate access to the full HR metrics.</a:t>
+            </a:r>
+            <a:endParaRPr sz="1100" b="0" dirty="0">
+              <a:solidFill>
+                <a:srgbClr val="B0BEC5"/>
+              </a:solidFill>
+              <a:latin typeface="Calibri"/>
+            </a:endParaRPr>
+          </a:p>
+        </p:txBody>
+      </p:sp>
+      <p:sp>
+        <p:nvSpPr>
+          <p:cNvPr id="34" name="Rectangle 33">
+            <a:extLst>
+              <a:ext uri="{FF2B5EF4-FFF2-40B4-BE49-F238E27FC236}">
+                <a16:creationId xmlns:a16="http://schemas.microsoft.com/office/drawing/2014/main" id="{46606D23-0EC3-E04C-8BC9-EB756A10B1F6}"/>
+              </a:ext>
+            </a:extLst>
+          </p:cNvPr>
+          <p:cNvSpPr/>
+          <p:nvPr/>
+        </p:nvSpPr>
+        <p:spPr>
+          <a:xfrm>
+            <a:off x="8229600" y="1753961"/>
+            <a:ext cx="3657600" cy="1920240"/>
+          </a:xfrm>
+          <a:prstGeom prst="rect">
+            <a:avLst/>
+          </a:prstGeom>
+          <a:solidFill>
+            <a:srgbClr val="162044"/>
+          </a:solidFill>
+          <a:ln w="12700">
+            <a:solidFill>
+              <a:srgbClr val="F5C430"/>
+            </a:solidFill>
+          </a:ln>
+        </p:spPr>
+        <p:style>
+          <a:lnRef idx="1">
+            <a:schemeClr val="accent1"/>
+          </a:lnRef>
+          <a:fillRef idx="3">
+            <a:schemeClr val="accent1"/>
+          </a:fillRef>
+          <a:effectRef idx="2">
+            <a:schemeClr val="accent1"/>
+          </a:effectRef>
+          <a:fontRef idx="minor">
+            <a:schemeClr val="lt1"/>
+          </a:fontRef>
+        </p:style>
+        <p:txBody>
+          <a:bodyPr rtlCol="0" anchor="ctr"/>
+          <a:lstStyle/>
+          <a:p>
+            <a:pPr algn="ctr"/>
+            <a:endParaRPr/>
+          </a:p>
+        </p:txBody>
+      </p:sp>
+      <p:sp>
+        <p:nvSpPr>
+          <p:cNvPr id="37" name="TextBox 36">
+            <a:extLst>
+              <a:ext uri="{FF2B5EF4-FFF2-40B4-BE49-F238E27FC236}">
+                <a16:creationId xmlns:a16="http://schemas.microsoft.com/office/drawing/2014/main" id="{761ACEDF-5309-7FA6-E77F-5F292A4BB875}"/>
+              </a:ext>
+            </a:extLst>
+          </p:cNvPr>
+          <p:cNvSpPr txBox="1"/>
+          <p:nvPr/>
+        </p:nvSpPr>
+        <p:spPr>
+          <a:xfrm>
+            <a:off x="8439912" y="2904083"/>
+            <a:ext cx="3291840" cy="430887"/>
+          </a:xfrm>
+          <a:prstGeom prst="rect">
+            <a:avLst/>
+          </a:prstGeom>
+          <a:noFill/>
+          <a:ln>
+            <a:noFill/>
+          </a:ln>
+        </p:spPr>
+        <p:txBody>
+          <a:bodyPr wrap="square">
+            <a:spAutoFit/>
+          </a:bodyPr>
+          <a:lstStyle/>
+          <a:p>
+            <a:pPr algn="l"/>
+            <a:r>
+              <a:rPr lang="en-US" sz="1100" b="0" dirty="0">
+                <a:solidFill>
+                  <a:srgbClr val="B0BEC5"/>
+                </a:solidFill>
+                <a:latin typeface="Calibri"/>
+              </a:rPr>
+              <a:t>The TA team can Avoid the re-hire violation cases while working independently.</a:t>
+            </a:r>
+            <a:endParaRPr sz="1100" b="0" dirty="0">
+              <a:solidFill>
+                <a:srgbClr val="B0BEC5"/>
+              </a:solidFill>
+              <a:latin typeface="Calibri"/>
+            </a:endParaRPr>
+          </a:p>
+        </p:txBody>
+      </p:sp>
+      <p:sp>
+        <p:nvSpPr>
+          <p:cNvPr id="38" name="TextBox 37">
+            <a:extLst>
+              <a:ext uri="{FF2B5EF4-FFF2-40B4-BE49-F238E27FC236}">
+                <a16:creationId xmlns:a16="http://schemas.microsoft.com/office/drawing/2014/main" id="{C6CF6178-0061-85FD-EBF2-641CD9155B93}"/>
+              </a:ext>
+            </a:extLst>
+          </p:cNvPr>
+          <p:cNvSpPr txBox="1"/>
+          <p:nvPr/>
+        </p:nvSpPr>
+        <p:spPr>
+          <a:xfrm>
+            <a:off x="457200" y="563138"/>
+            <a:ext cx="10972800" cy="615553"/>
+          </a:xfrm>
+          <a:prstGeom prst="rect">
+            <a:avLst/>
+          </a:prstGeom>
+          <a:noFill/>
+          <a:ln>
+            <a:noFill/>
+          </a:ln>
+        </p:spPr>
+        <p:txBody>
+          <a:bodyPr wrap="square">
+            <a:spAutoFit/>
+          </a:bodyPr>
+          <a:lstStyle/>
+          <a:p>
+            <a:pPr algn="l"/>
+            <a:r>
+              <a:rPr lang="en-US" sz="3400" b="1" dirty="0">
+                <a:solidFill>
+                  <a:srgbClr val="FFFFFF"/>
+                </a:solidFill>
+                <a:latin typeface="Calibri"/>
+              </a:rPr>
+              <a:t>Automation Impact</a:t>
+            </a:r>
+            <a:endParaRPr sz="3400" b="1" dirty="0">
+              <a:solidFill>
+                <a:srgbClr val="FFFFFF"/>
+              </a:solidFill>
+              <a:latin typeface="Calibri"/>
+            </a:endParaRPr>
+          </a:p>
+        </p:txBody>
+      </p:sp>
+      <p:sp>
+        <p:nvSpPr>
+          <p:cNvPr id="39" name="TextBox 38">
+            <a:extLst>
+              <a:ext uri="{FF2B5EF4-FFF2-40B4-BE49-F238E27FC236}">
+                <a16:creationId xmlns:a16="http://schemas.microsoft.com/office/drawing/2014/main" id="{BF9CBBBB-2024-7523-03AD-355A3A1CDA20}"/>
+              </a:ext>
+            </a:extLst>
+          </p:cNvPr>
+          <p:cNvSpPr txBox="1"/>
+          <p:nvPr/>
+        </p:nvSpPr>
+        <p:spPr>
+          <a:xfrm>
+            <a:off x="8412480" y="2203499"/>
+            <a:ext cx="3291840" cy="707886"/>
+          </a:xfrm>
+          <a:prstGeom prst="rect">
+            <a:avLst/>
+          </a:prstGeom>
+          <a:noFill/>
+          <a:ln>
+            <a:noFill/>
+          </a:ln>
+        </p:spPr>
+        <p:txBody>
+          <a:bodyPr wrap="square">
+            <a:spAutoFit/>
+          </a:bodyPr>
+          <a:lstStyle/>
+          <a:p>
+            <a:pPr algn="l"/>
+            <a:r>
+              <a:rPr lang="en-US" sz="2000" b="1" dirty="0">
+                <a:solidFill>
+                  <a:srgbClr val="F5C430"/>
+                </a:solidFill>
+                <a:latin typeface="Calibri"/>
+              </a:rPr>
+              <a:t>+20 mins of communication Saved per candidate</a:t>
+            </a:r>
+          </a:p>
+        </p:txBody>
+      </p:sp>
+      <p:sp>
+        <p:nvSpPr>
+          <p:cNvPr id="40" name="TextBox 39">
+            <a:extLst>
+              <a:ext uri="{FF2B5EF4-FFF2-40B4-BE49-F238E27FC236}">
+                <a16:creationId xmlns:a16="http://schemas.microsoft.com/office/drawing/2014/main" id="{9D664B2F-992C-B6AA-5B69-0BD80D3A8DCC}"/>
+              </a:ext>
+            </a:extLst>
+          </p:cNvPr>
+          <p:cNvSpPr txBox="1"/>
+          <p:nvPr/>
+        </p:nvSpPr>
+        <p:spPr>
+          <a:xfrm>
+            <a:off x="8412480" y="1883238"/>
+            <a:ext cx="3291840" cy="369332"/>
+          </a:xfrm>
+          <a:prstGeom prst="rect">
+            <a:avLst/>
+          </a:prstGeom>
+          <a:noFill/>
+          <a:ln>
+            <a:noFill/>
+          </a:ln>
+        </p:spPr>
+        <p:txBody>
+          <a:bodyPr wrap="square">
+            <a:spAutoFit/>
+          </a:bodyPr>
+          <a:lstStyle/>
+          <a:p>
+            <a:pPr algn="l"/>
+            <a:r>
+              <a:rPr lang="en-US" b="1" dirty="0">
+                <a:solidFill>
+                  <a:srgbClr val="FFFFFF"/>
+                </a:solidFill>
+                <a:latin typeface="Calibri"/>
+              </a:rPr>
+              <a:t>Employee Lookup Tool</a:t>
+            </a:r>
+            <a:endParaRPr b="1" dirty="0">
+              <a:solidFill>
+                <a:srgbClr val="FFFFFF"/>
+              </a:solidFill>
+              <a:latin typeface="Calibri"/>
+            </a:endParaRPr>
+          </a:p>
+        </p:txBody>
+      </p:sp>
+      <p:sp>
+        <p:nvSpPr>
+          <p:cNvPr id="41" name="TextBox 40">
+            <a:extLst>
+              <a:ext uri="{FF2B5EF4-FFF2-40B4-BE49-F238E27FC236}">
+                <a16:creationId xmlns:a16="http://schemas.microsoft.com/office/drawing/2014/main" id="{DA4ACBD1-F914-1FE5-5E16-DAAAD5D6DE6C}"/>
+              </a:ext>
+            </a:extLst>
+          </p:cNvPr>
+          <p:cNvSpPr txBox="1"/>
+          <p:nvPr/>
+        </p:nvSpPr>
+        <p:spPr>
+          <a:xfrm>
+            <a:off x="640080" y="2209354"/>
+            <a:ext cx="3291840" cy="400110"/>
+          </a:xfrm>
+          <a:prstGeom prst="rect">
+            <a:avLst/>
+          </a:prstGeom>
+          <a:noFill/>
+          <a:ln>
+            <a:noFill/>
+          </a:ln>
+        </p:spPr>
+        <p:txBody>
+          <a:bodyPr wrap="square">
+            <a:spAutoFit/>
+          </a:bodyPr>
+          <a:lstStyle/>
+          <a:p>
+            <a:pPr algn="l"/>
+            <a:r>
+              <a:rPr lang="en-US" sz="2000" b="1" dirty="0">
+                <a:solidFill>
+                  <a:srgbClr val="F5C430"/>
+                </a:solidFill>
+                <a:latin typeface="Calibri"/>
+              </a:rPr>
+              <a:t>+176 Hours Saved Monthly</a:t>
+            </a:r>
+          </a:p>
+        </p:txBody>
+      </p:sp>
+      <p:sp>
+        <p:nvSpPr>
+          <p:cNvPr id="42" name="TextBox 41">
+            <a:extLst>
+              <a:ext uri="{FF2B5EF4-FFF2-40B4-BE49-F238E27FC236}">
+                <a16:creationId xmlns:a16="http://schemas.microsoft.com/office/drawing/2014/main" id="{AC3EB0BE-8DEC-E60A-13AA-F52288EAAC67}"/>
+              </a:ext>
+            </a:extLst>
+          </p:cNvPr>
+          <p:cNvSpPr txBox="1"/>
+          <p:nvPr/>
+        </p:nvSpPr>
+        <p:spPr>
+          <a:xfrm>
+            <a:off x="640080" y="1889093"/>
+            <a:ext cx="3291840" cy="369332"/>
+          </a:xfrm>
+          <a:prstGeom prst="rect">
+            <a:avLst/>
+          </a:prstGeom>
+          <a:noFill/>
+          <a:ln>
+            <a:noFill/>
+          </a:ln>
+        </p:spPr>
+        <p:txBody>
+          <a:bodyPr wrap="square">
+            <a:spAutoFit/>
+          </a:bodyPr>
+          <a:lstStyle/>
+          <a:p>
+            <a:pPr algn="l"/>
+            <a:r>
+              <a:rPr lang="en-US" b="1" dirty="0">
+                <a:solidFill>
+                  <a:srgbClr val="FFFFFF"/>
+                </a:solidFill>
+                <a:latin typeface="Calibri"/>
+              </a:rPr>
+              <a:t>Attendance Dashboard</a:t>
+            </a:r>
+            <a:endParaRPr b="1" dirty="0">
+              <a:solidFill>
+                <a:srgbClr val="FFFFFF"/>
+              </a:solidFill>
+              <a:latin typeface="Calibri"/>
+            </a:endParaRPr>
+          </a:p>
+        </p:txBody>
+      </p:sp>
+      <p:sp>
+        <p:nvSpPr>
+          <p:cNvPr id="43" name="TextBox 42">
+            <a:extLst>
+              <a:ext uri="{FF2B5EF4-FFF2-40B4-BE49-F238E27FC236}">
+                <a16:creationId xmlns:a16="http://schemas.microsoft.com/office/drawing/2014/main" id="{16E78A7D-B141-D40D-3471-03730CFE5A28}"/>
+              </a:ext>
+            </a:extLst>
+          </p:cNvPr>
+          <p:cNvSpPr txBox="1"/>
+          <p:nvPr/>
+        </p:nvSpPr>
+        <p:spPr>
+          <a:xfrm>
+            <a:off x="640080" y="2718280"/>
+            <a:ext cx="3291840" cy="600164"/>
+          </a:xfrm>
+          <a:prstGeom prst="rect">
+            <a:avLst/>
+          </a:prstGeom>
+          <a:noFill/>
+          <a:ln>
+            <a:noFill/>
+          </a:ln>
+        </p:spPr>
+        <p:txBody>
+          <a:bodyPr wrap="square">
+            <a:spAutoFit/>
+          </a:bodyPr>
+          <a:lstStyle/>
+          <a:p>
+            <a:pPr algn="l"/>
+            <a:r>
+              <a:rPr lang="en-US" sz="1100" b="0" dirty="0">
+                <a:solidFill>
+                  <a:srgbClr val="B0BEC5"/>
+                </a:solidFill>
+                <a:latin typeface="Calibri"/>
+              </a:rPr>
+              <a:t>It takes on Average 8.2 Hours each time to run the attendance report Manually, now we can run it on daily bases in less than 5 minutes.</a:t>
+            </a:r>
+            <a:endParaRPr sz="1100" b="0" dirty="0">
+              <a:solidFill>
+                <a:srgbClr val="B0BEC5"/>
+              </a:solidFill>
+              <a:latin typeface="Calibri"/>
+            </a:endParaRPr>
+          </a:p>
+        </p:txBody>
+      </p:sp>
+      <p:sp>
+        <p:nvSpPr>
+          <p:cNvPr id="44" name="TextBox 43">
+            <a:extLst>
+              <a:ext uri="{FF2B5EF4-FFF2-40B4-BE49-F238E27FC236}">
+                <a16:creationId xmlns:a16="http://schemas.microsoft.com/office/drawing/2014/main" id="{7F1C75D3-92A2-2F25-ADD2-E571DE920033}"/>
+              </a:ext>
+            </a:extLst>
+          </p:cNvPr>
+          <p:cNvSpPr txBox="1"/>
+          <p:nvPr/>
+        </p:nvSpPr>
+        <p:spPr>
+          <a:xfrm>
+            <a:off x="2638213" y="4322210"/>
+            <a:ext cx="3291840" cy="400110"/>
+          </a:xfrm>
+          <a:prstGeom prst="rect">
+            <a:avLst/>
+          </a:prstGeom>
+          <a:noFill/>
+          <a:ln>
+            <a:noFill/>
+          </a:ln>
+        </p:spPr>
+        <p:txBody>
+          <a:bodyPr wrap="square">
+            <a:spAutoFit/>
+          </a:bodyPr>
+          <a:lstStyle/>
+          <a:p>
+            <a:pPr algn="l"/>
+            <a:r>
+              <a:rPr lang="en-US" sz="2000" b="1" dirty="0">
+                <a:solidFill>
+                  <a:srgbClr val="F5C430"/>
+                </a:solidFill>
+                <a:latin typeface="Calibri"/>
+              </a:rPr>
+              <a:t>750$ Saved</a:t>
+            </a:r>
+          </a:p>
+        </p:txBody>
+      </p:sp>
+      <p:sp>
+        <p:nvSpPr>
+          <p:cNvPr id="45" name="TextBox 44">
+            <a:extLst>
+              <a:ext uri="{FF2B5EF4-FFF2-40B4-BE49-F238E27FC236}">
+                <a16:creationId xmlns:a16="http://schemas.microsoft.com/office/drawing/2014/main" id="{3CF8BD31-5AAD-D3F0-3307-A4AE9AFF3668}"/>
+              </a:ext>
+            </a:extLst>
+          </p:cNvPr>
+          <p:cNvSpPr txBox="1"/>
+          <p:nvPr/>
+        </p:nvSpPr>
+        <p:spPr>
+          <a:xfrm>
+            <a:off x="2638213" y="4001949"/>
+            <a:ext cx="3291840" cy="369332"/>
+          </a:xfrm>
+          <a:prstGeom prst="rect">
+            <a:avLst/>
+          </a:prstGeom>
+          <a:noFill/>
+          <a:ln>
+            <a:noFill/>
+          </a:ln>
+        </p:spPr>
+        <p:txBody>
+          <a:bodyPr wrap="square">
+            <a:spAutoFit/>
+          </a:bodyPr>
+          <a:lstStyle/>
+          <a:p>
+            <a:pPr algn="l"/>
+            <a:r>
+              <a:rPr lang="en-US" b="1" dirty="0">
+                <a:solidFill>
+                  <a:srgbClr val="FFFFFF"/>
+                </a:solidFill>
+                <a:latin typeface="Calibri"/>
+              </a:rPr>
+              <a:t>Event Quiz Tool</a:t>
+            </a:r>
+            <a:endParaRPr b="1" dirty="0">
+              <a:solidFill>
+                <a:srgbClr val="FFFFFF"/>
+              </a:solidFill>
+              <a:latin typeface="Calibri"/>
+            </a:endParaRPr>
+          </a:p>
+        </p:txBody>
+      </p:sp>
+      <p:sp>
+        <p:nvSpPr>
+          <p:cNvPr id="46" name="TextBox 45">
+            <a:extLst>
+              <a:ext uri="{FF2B5EF4-FFF2-40B4-BE49-F238E27FC236}">
+                <a16:creationId xmlns:a16="http://schemas.microsoft.com/office/drawing/2014/main" id="{78EC1892-DD5B-0618-37CB-214CA0CCE760}"/>
+              </a:ext>
+            </a:extLst>
+          </p:cNvPr>
+          <p:cNvSpPr txBox="1"/>
+          <p:nvPr/>
+        </p:nvSpPr>
+        <p:spPr>
+          <a:xfrm>
+            <a:off x="6583680" y="4322210"/>
+            <a:ext cx="3291840" cy="707886"/>
+          </a:xfrm>
+          <a:prstGeom prst="rect">
+            <a:avLst/>
+          </a:prstGeom>
+          <a:noFill/>
+          <a:ln>
+            <a:noFill/>
+          </a:ln>
+        </p:spPr>
+        <p:txBody>
+          <a:bodyPr wrap="square">
+            <a:spAutoFit/>
+          </a:bodyPr>
+          <a:lstStyle/>
+          <a:p>
+            <a:pPr algn="l"/>
+            <a:r>
+              <a:rPr lang="en-US" sz="2000" b="1" dirty="0">
+                <a:solidFill>
+                  <a:srgbClr val="F5C430"/>
+                </a:solidFill>
+                <a:latin typeface="Calibri"/>
+              </a:rPr>
+              <a:t>Branded &amp; Customized at 0$ Cost</a:t>
+            </a:r>
+          </a:p>
+        </p:txBody>
+      </p:sp>
+      <p:sp>
+        <p:nvSpPr>
+          <p:cNvPr id="47" name="TextBox 46">
+            <a:extLst>
+              <a:ext uri="{FF2B5EF4-FFF2-40B4-BE49-F238E27FC236}">
+                <a16:creationId xmlns:a16="http://schemas.microsoft.com/office/drawing/2014/main" id="{8DB858EF-1BEB-5F5A-2E33-A43A29029DAE}"/>
+              </a:ext>
+            </a:extLst>
+          </p:cNvPr>
+          <p:cNvSpPr txBox="1"/>
+          <p:nvPr/>
+        </p:nvSpPr>
+        <p:spPr>
+          <a:xfrm>
+            <a:off x="6583680" y="4001949"/>
+            <a:ext cx="3291840" cy="369332"/>
+          </a:xfrm>
+          <a:prstGeom prst="rect">
+            <a:avLst/>
+          </a:prstGeom>
+          <a:noFill/>
+          <a:ln>
+            <a:noFill/>
+          </a:ln>
+        </p:spPr>
+        <p:txBody>
+          <a:bodyPr wrap="square">
+            <a:spAutoFit/>
+          </a:bodyPr>
+          <a:lstStyle/>
+          <a:p>
+            <a:pPr algn="l"/>
+            <a:r>
+              <a:rPr lang="en-US" b="1" dirty="0">
+                <a:solidFill>
+                  <a:srgbClr val="FFFFFF"/>
+                </a:solidFill>
+                <a:latin typeface="Calibri"/>
+              </a:rPr>
+              <a:t>Event Lucky Draw Tool</a:t>
+            </a:r>
+            <a:endParaRPr b="1" dirty="0">
+              <a:solidFill>
+                <a:srgbClr val="FFFFFF"/>
+              </a:solidFill>
+              <a:latin typeface="Calibri"/>
+            </a:endParaRPr>
+          </a:p>
+        </p:txBody>
+      </p:sp>
+      <p:pic>
+        <p:nvPicPr>
+          <p:cNvPr id="48" name="Picture 47">
+            <a:extLst>
+              <a:ext uri="{FF2B5EF4-FFF2-40B4-BE49-F238E27FC236}">
+                <a16:creationId xmlns:a16="http://schemas.microsoft.com/office/drawing/2014/main" id="{273B5C0B-F5F5-A88C-8E75-DA6512FADF7F}"/>
+              </a:ext>
+            </a:extLst>
+          </p:cNvPr>
+          <p:cNvPicPr>
+            <a:picLocks noChangeAspect="1"/>
+          </p:cNvPicPr>
+          <p:nvPr/>
+        </p:nvPicPr>
+        <p:blipFill>
+          <a:blip r:embed="rId2"/>
+          <a:stretch>
+            <a:fillRect/>
+          </a:stretch>
+        </p:blipFill>
+        <p:spPr>
+          <a:xfrm>
+            <a:off x="10945933" y="205308"/>
+            <a:ext cx="968134" cy="935736"/>
+          </a:xfrm>
+          <a:prstGeom prst="rect">
+            <a:avLst/>
+          </a:prstGeom>
+        </p:spPr>
+      </p:pic>
+    </p:spTree>
+    <p:extLst>
+      <p:ext uri="{BB962C8B-B14F-4D97-AF65-F5344CB8AC3E}">
+        <p14:creationId xmlns:p14="http://schemas.microsoft.com/office/powerpoint/2010/main" val="3000514009"/>
+      </p:ext>
+    </p:extLst>
+  </p:cSld>
+  <p:clrMapOvr>
+    <a:masterClrMapping/>
+  </p:clrMapOvr>
+</p:sld>
+</file>
+
+<file path=ppt/slides/slide5.xml><?xml version="1.0" encoding="utf-8"?>
+<p:sld xmlns:a="http://schemas.openxmlformats.org/drawingml/2006/main" xmlns:r="http://schemas.openxmlformats.org/officeDocument/2006/relationships" xmlns:p="http://schemas.openxmlformats.org/presentationml/2006/main">
   <p:cSld>
     <p:bg>
       <p:bgPr>
@@ -5873,7 +7530,14 @@
         <p:cNvGrpSpPr/>
         <p:nvPr/>
       </p:nvGrpSpPr>
-      <p:grpSpPr/>
+      <p:grpSpPr>
+        <a:xfrm>
+          <a:off x="0" y="0"/>
+          <a:ext cx="0" cy="0"/>
+          <a:chOff x="0" y="0"/>
+          <a:chExt cx="0" cy="0"/>
+        </a:xfrm>
+      </p:grpSpPr>
       <p:sp>
         <p:nvSpPr>
           <p:cNvPr id="2" name="TextBox 1"/>
@@ -5990,6 +7654,7 @@
           <a:lstStyle/>
           <a:p>
             <a:pPr algn="ctr"/>
+            <a:endParaRPr/>
           </a:p>
         </p:txBody>
       </p:sp>
@@ -6035,6 +7700,7 @@
           <a:lstStyle/>
           <a:p>
             <a:pPr algn="ctr"/>
+            <a:endParaRPr/>
           </a:p>
         </p:txBody>
       </p:sp>
@@ -6078,6 +7744,7 @@
           <a:lstStyle/>
           <a:p>
             <a:pPr algn="ctr"/>
+            <a:endParaRPr/>
           </a:p>
         </p:txBody>
       </p:sp>
@@ -6159,6 +7826,7 @@
           <a:lstStyle/>
           <a:p>
             <a:pPr algn="ctr"/>
+            <a:endParaRPr/>
           </a:p>
         </p:txBody>
       </p:sp>
@@ -6209,7 +7877,7 @@
         <p:spPr>
           <a:xfrm>
             <a:off x="804672" y="1920240"/>
-            <a:ext cx="5029200" cy="438912"/>
+            <a:ext cx="5029200" cy="261610"/>
           </a:xfrm>
           <a:prstGeom prst="rect">
             <a:avLst/>
@@ -6227,14 +7895,20 @@
           <a:p>
             <a:pPr algn="l"/>
             <a:r>
-              <a:rPr sz="1000" b="0">
+              <a:rPr lang="en-US" sz="1100" b="1" dirty="0">
                 <a:solidFill>
                   <a:srgbClr val="B0BEC5"/>
                 </a:solidFill>
                 <a:latin typeface="Calibri"/>
               </a:rPr>
-              <a:t>Leave management was fully email-based — slow and error-prone.</a:t>
-            </a:r>
+              <a:t>Needed to support the HR team with insights to make data driven decisions.</a:t>
+            </a:r>
+            <a:endParaRPr sz="1100" b="1" dirty="0">
+              <a:solidFill>
+                <a:srgbClr val="B0BEC5"/>
+              </a:solidFill>
+              <a:latin typeface="Calibri"/>
+            </a:endParaRPr>
           </a:p>
         </p:txBody>
       </p:sp>
@@ -6278,6 +7952,7 @@
           <a:lstStyle/>
           <a:p>
             <a:pPr algn="ctr"/>
+            <a:endParaRPr/>
           </a:p>
         </p:txBody>
       </p:sp>
@@ -6328,7 +8003,7 @@
         <p:spPr>
           <a:xfrm>
             <a:off x="804672" y="2414016"/>
-            <a:ext cx="5029200" cy="438912"/>
+            <a:ext cx="5029200" cy="261610"/>
           </a:xfrm>
           <a:prstGeom prst="rect">
             <a:avLst/>
@@ -6346,14 +8021,20 @@
           <a:p>
             <a:pPr algn="l"/>
             <a:r>
-              <a:rPr sz="1000" b="0">
+              <a:rPr lang="en-US" sz="1100" b="1" dirty="0">
                 <a:solidFill>
                   <a:srgbClr val="B0BEC5"/>
                 </a:solidFill>
                 <a:latin typeface="Calibri"/>
               </a:rPr>
-              <a:t>Find and implement digital HR solutions proactively.</a:t>
-            </a:r>
+              <a:t>Reviewed the available data and  resources</a:t>
+            </a:r>
+            <a:endParaRPr sz="1100" b="1" dirty="0">
+              <a:solidFill>
+                <a:srgbClr val="B0BEC5"/>
+              </a:solidFill>
+              <a:latin typeface="Calibri"/>
+            </a:endParaRPr>
           </a:p>
         </p:txBody>
       </p:sp>
@@ -6397,6 +8078,7 @@
           <a:lstStyle/>
           <a:p>
             <a:pPr algn="ctr"/>
+            <a:endParaRPr/>
           </a:p>
         </p:txBody>
       </p:sp>
@@ -6447,7 +8129,7 @@
         <p:spPr>
           <a:xfrm>
             <a:off x="804672" y="2907792"/>
-            <a:ext cx="5029200" cy="438912"/>
+            <a:ext cx="5029200" cy="261610"/>
           </a:xfrm>
           <a:prstGeom prst="rect">
             <a:avLst/>
@@ -6465,13 +8147,31 @@
           <a:p>
             <a:pPr algn="l"/>
             <a:r>
-              <a:rPr sz="1000" b="0">
+              <a:rPr sz="1100" b="1" dirty="0">
                 <a:solidFill>
                   <a:srgbClr val="B0BEC5"/>
                 </a:solidFill>
                 <a:latin typeface="Calibri"/>
               </a:rPr>
-              <a:t>Built Leave Automation, Attendance Dashboard &amp; iTalent implementation plan.</a:t>
+              <a:t>Built </a:t>
+            </a:r>
+            <a:r>
+              <a:rPr lang="en-US" sz="1100" b="1" dirty="0">
+                <a:solidFill>
+                  <a:srgbClr val="B0BEC5"/>
+                </a:solidFill>
+                <a:latin typeface="Calibri"/>
+              </a:rPr>
+              <a:t>HR analytics</a:t>
+            </a:r>
+            <a:r>
+              <a:rPr sz="1100" b="1" dirty="0">
+                <a:solidFill>
+                  <a:srgbClr val="B0BEC5"/>
+                </a:solidFill>
+                <a:latin typeface="Calibri"/>
+              </a:rPr>
+              <a:t> Dashboard</a:t>
             </a:r>
           </a:p>
         </p:txBody>
@@ -6516,6 +8216,7 @@
           <a:lstStyle/>
           <a:p>
             <a:pPr algn="ctr"/>
+            <a:endParaRPr/>
           </a:p>
         </p:txBody>
       </p:sp>
@@ -6566,7 +8267,7 @@
         <p:spPr>
           <a:xfrm>
             <a:off x="804672" y="3401568"/>
-            <a:ext cx="5029200" cy="438912"/>
+            <a:ext cx="5029200" cy="261610"/>
           </a:xfrm>
           <a:prstGeom prst="rect">
             <a:avLst/>
@@ -6584,13 +8285,31 @@
           <a:p>
             <a:pPr algn="l"/>
             <a:r>
-              <a:rPr sz="1000" b="0">
+              <a:rPr sz="1100" b="1" dirty="0">
                 <a:solidFill>
                   <a:srgbClr val="F5C430"/>
                 </a:solidFill>
                 <a:latin typeface="Calibri"/>
               </a:rPr>
-              <a:t>Reduced manual effort; laid foundation for a fully digital HR operation.</a:t>
+              <a:t>Reduced manual effort; laid foundation for a fully digital HR </a:t>
+            </a:r>
+            <a:r>
+              <a:rPr lang="en-US" sz="1100" b="1" dirty="0">
+                <a:solidFill>
+                  <a:srgbClr val="F5C430"/>
+                </a:solidFill>
+                <a:latin typeface="Calibri"/>
+              </a:rPr>
+              <a:t>data Analysis tool</a:t>
+            </a:r>
+            <a:r>
+              <a:rPr sz="1100" b="1" dirty="0">
+                <a:solidFill>
+                  <a:srgbClr val="F5C430"/>
+                </a:solidFill>
+                <a:latin typeface="Calibri"/>
+              </a:rPr>
+              <a:t>.</a:t>
             </a:r>
           </a:p>
         </p:txBody>
@@ -6637,6 +8356,7 @@
           <a:lstStyle/>
           <a:p>
             <a:pPr algn="ctr"/>
+            <a:endParaRPr/>
           </a:p>
         </p:txBody>
       </p:sp>
@@ -6680,6 +8400,7 @@
           <a:lstStyle/>
           <a:p>
             <a:pPr algn="ctr"/>
+            <a:endParaRPr/>
           </a:p>
         </p:txBody>
       </p:sp>
@@ -6761,6 +8482,7 @@
           <a:lstStyle/>
           <a:p>
             <a:pPr algn="ctr"/>
+            <a:endParaRPr/>
           </a:p>
         </p:txBody>
       </p:sp>
@@ -6811,7 +8533,7 @@
         <p:spPr>
           <a:xfrm>
             <a:off x="6611112" y="1920240"/>
-            <a:ext cx="5029200" cy="438912"/>
+            <a:ext cx="5029200" cy="261610"/>
           </a:xfrm>
           <a:prstGeom prst="rect">
             <a:avLst/>
@@ -6829,14 +8551,20 @@
           <a:p>
             <a:pPr algn="l"/>
             <a:r>
-              <a:rPr sz="1000" b="0">
+              <a:rPr lang="en-US" sz="1100" b="1" dirty="0">
                 <a:solidFill>
                   <a:srgbClr val="B0BEC5"/>
                 </a:solidFill>
                 <a:latin typeface="Calibri"/>
               </a:rPr>
-              <a:t>51Talk Egypt needed structured onboarding to support rapid growth.</a:t>
-            </a:r>
+              <a:t>Needed to support the Business teams with visibility on their teams’ attendance. </a:t>
+            </a:r>
+            <a:endParaRPr sz="1100" b="1" dirty="0">
+              <a:solidFill>
+                <a:srgbClr val="B0BEC5"/>
+              </a:solidFill>
+              <a:latin typeface="Calibri"/>
+            </a:endParaRPr>
           </a:p>
         </p:txBody>
       </p:sp>
@@ -6880,6 +8608,7 @@
           <a:lstStyle/>
           <a:p>
             <a:pPr algn="ctr"/>
+            <a:endParaRPr/>
           </a:p>
         </p:txBody>
       </p:sp>
@@ -6930,7 +8659,7 @@
         <p:spPr>
           <a:xfrm>
             <a:off x="6611112" y="2414016"/>
-            <a:ext cx="5029200" cy="438912"/>
+            <a:ext cx="5029200" cy="261610"/>
           </a:xfrm>
           <a:prstGeom prst="rect">
             <a:avLst/>
@@ -6946,15 +8675,13 @@
           </a:bodyPr>
           <a:lstStyle/>
           <a:p>
-            <a:pPr algn="l"/>
-            <a:r>
-              <a:rPr sz="1000" b="0">
+            <a:r>
+              <a:rPr lang="en-US" sz="1100" b="1" dirty="0">
                 <a:solidFill>
                   <a:srgbClr val="B0BEC5"/>
                 </a:solidFill>
-                <a:latin typeface="Calibri"/>
-              </a:rPr>
-              <a:t>Ensure every new hire has a smooth, consistent experience.</a:t>
+              </a:rPr>
+              <a:t>Find and implement digital HR solutions proactively.</a:t>
             </a:r>
           </a:p>
         </p:txBody>
@@ -6999,6 +8726,7 @@
           <a:lstStyle/>
           <a:p>
             <a:pPr algn="ctr"/>
+            <a:endParaRPr/>
           </a:p>
         </p:txBody>
       </p:sp>
@@ -7049,7 +8777,7 @@
         <p:spPr>
           <a:xfrm>
             <a:off x="6611112" y="2907792"/>
-            <a:ext cx="5029200" cy="438912"/>
+            <a:ext cx="5029200" cy="261610"/>
           </a:xfrm>
           <a:prstGeom prst="rect">
             <a:avLst/>
@@ -7065,15 +8793,13 @@
           </a:bodyPr>
           <a:lstStyle/>
           <a:p>
-            <a:pPr algn="l"/>
-            <a:r>
-              <a:rPr sz="1000" b="0">
+            <a:r>
+              <a:rPr lang="en-US" sz="1100" b="1" dirty="0">
                 <a:solidFill>
                   <a:srgbClr val="B0BEC5"/>
                 </a:solidFill>
-                <a:latin typeface="Calibri"/>
-              </a:rPr>
-              <a:t>Managed end-to-end onboarding for 100 employees in 3 months.</a:t>
+              </a:rPr>
+              <a:t>Built Attendance Dashboard with continuous enhancements over 4 versions.</a:t>
             </a:r>
           </a:p>
         </p:txBody>
@@ -7118,6 +8844,7 @@
           <a:lstStyle/>
           <a:p>
             <a:pPr algn="ctr"/>
+            <a:endParaRPr/>
           </a:p>
         </p:txBody>
       </p:sp>
@@ -7168,7 +8895,7 @@
         <p:spPr>
           <a:xfrm>
             <a:off x="6611112" y="3401568"/>
-            <a:ext cx="5029200" cy="438912"/>
+            <a:ext cx="5029200" cy="430887"/>
           </a:xfrm>
           <a:prstGeom prst="rect">
             <a:avLst/>
@@ -7186,14 +8913,20 @@
           <a:p>
             <a:pPr algn="l"/>
             <a:r>
-              <a:rPr sz="1000" b="0">
+              <a:rPr lang="en-US" sz="1100" b="1" dirty="0">
                 <a:solidFill>
                   <a:srgbClr val="F5C430"/>
                 </a:solidFill>
                 <a:latin typeface="Calibri"/>
               </a:rPr>
-              <a:t>100 employees fully integrated — zero onboarding gaps reported.</a:t>
-            </a:r>
+              <a:t>Noticeably reduced manual efforts with full visibility on the team attendance on daily basis</a:t>
+            </a:r>
+            <a:endParaRPr sz="1100" b="1" dirty="0">
+              <a:solidFill>
+                <a:srgbClr val="F5C430"/>
+              </a:solidFill>
+              <a:latin typeface="Calibri"/>
+            </a:endParaRPr>
           </a:p>
         </p:txBody>
       </p:sp>
@@ -7239,6 +8972,7 @@
           <a:lstStyle/>
           <a:p>
             <a:pPr algn="ctr"/>
+            <a:endParaRPr/>
           </a:p>
         </p:txBody>
       </p:sp>
@@ -7282,6 +9016,7 @@
           <a:lstStyle/>
           <a:p>
             <a:pPr algn="ctr"/>
+            <a:endParaRPr/>
           </a:p>
         </p:txBody>
       </p:sp>
@@ -7363,6 +9098,7 @@
           <a:lstStyle/>
           <a:p>
             <a:pPr algn="ctr"/>
+            <a:endParaRPr/>
           </a:p>
         </p:txBody>
       </p:sp>
@@ -7413,7 +9149,7 @@
         <p:spPr>
           <a:xfrm>
             <a:off x="804672" y="4526280"/>
-            <a:ext cx="5029200" cy="438912"/>
+            <a:ext cx="5029200" cy="430887"/>
           </a:xfrm>
           <a:prstGeom prst="rect">
             <a:avLst/>
@@ -7431,14 +9167,20 @@
           <a:p>
             <a:pPr algn="l"/>
             <a:r>
-              <a:rPr sz="1000" b="0">
+              <a:rPr lang="en-US" sz="1100" b="1" dirty="0">
                 <a:solidFill>
                   <a:srgbClr val="B0BEC5"/>
                 </a:solidFill>
                 <a:latin typeface="Calibri"/>
               </a:rPr>
-              <a:t>ER cases demand time, sensitivity, and deep HR expertise.</a:t>
-            </a:r>
+              <a:t>Needed Engagement tools for event considering the tight schedule and limited budget.</a:t>
+            </a:r>
+            <a:endParaRPr sz="1100" b="1" dirty="0">
+              <a:solidFill>
+                <a:srgbClr val="B0BEC5"/>
+              </a:solidFill>
+              <a:latin typeface="Calibri"/>
+            </a:endParaRPr>
           </a:p>
         </p:txBody>
       </p:sp>
@@ -7482,6 +9224,7 @@
           <a:lstStyle/>
           <a:p>
             <a:pPr algn="ctr"/>
+            <a:endParaRPr/>
           </a:p>
         </p:txBody>
       </p:sp>
@@ -7532,7 +9275,7 @@
         <p:spPr>
           <a:xfrm>
             <a:off x="804672" y="5020056"/>
-            <a:ext cx="5029200" cy="438912"/>
+            <a:ext cx="5029200" cy="261610"/>
           </a:xfrm>
           <a:prstGeom prst="rect">
             <a:avLst/>
@@ -7550,14 +9293,20 @@
           <a:p>
             <a:pPr algn="l"/>
             <a:r>
-              <a:rPr sz="1000" b="0">
+              <a:rPr lang="en-US" sz="1100" b="1" dirty="0">
                 <a:solidFill>
                   <a:srgbClr val="B0BEC5"/>
                 </a:solidFill>
                 <a:latin typeface="Calibri"/>
               </a:rPr>
-              <a:t>Handle all cases professionally while maintaining employee trust.</a:t>
-            </a:r>
+              <a:t>Find a solution for the Engagement quiz and Lucky Draw.</a:t>
+            </a:r>
+            <a:endParaRPr sz="1100" b="1" dirty="0">
+              <a:solidFill>
+                <a:srgbClr val="B0BEC5"/>
+              </a:solidFill>
+              <a:latin typeface="Calibri"/>
+            </a:endParaRPr>
           </a:p>
         </p:txBody>
       </p:sp>
@@ -7601,6 +9350,7 @@
           <a:lstStyle/>
           <a:p>
             <a:pPr algn="ctr"/>
+            <a:endParaRPr/>
           </a:p>
         </p:txBody>
       </p:sp>
@@ -7651,7 +9401,7 @@
         <p:spPr>
           <a:xfrm>
             <a:off x="804672" y="5513832"/>
-            <a:ext cx="5029200" cy="438912"/>
+            <a:ext cx="5029200" cy="261610"/>
           </a:xfrm>
           <a:prstGeom prst="rect">
             <a:avLst/>
@@ -7669,14 +9419,20 @@
           <a:p>
             <a:pPr algn="l"/>
             <a:r>
-              <a:rPr sz="1000" b="0">
+              <a:rPr lang="en-US" sz="1100" b="1" dirty="0">
                 <a:solidFill>
                   <a:srgbClr val="B0BEC5"/>
                 </a:solidFill>
                 <a:latin typeface="Calibri"/>
               </a:rPr>
-              <a:t>Managed 50 ER cases with full documentation and fair investigation.</a:t>
-            </a:r>
+              <a:t>Built 51Talk Live Quiz tool &amp; Lucky Draw tool</a:t>
+            </a:r>
+            <a:endParaRPr sz="1100" b="1" dirty="0">
+              <a:solidFill>
+                <a:srgbClr val="B0BEC5"/>
+              </a:solidFill>
+              <a:latin typeface="Calibri"/>
+            </a:endParaRPr>
           </a:p>
         </p:txBody>
       </p:sp>
@@ -7720,6 +9476,7 @@
           <a:lstStyle/>
           <a:p>
             <a:pPr algn="ctr"/>
+            <a:endParaRPr/>
           </a:p>
         </p:txBody>
       </p:sp>
@@ -7770,7 +9527,7 @@
         <p:spPr>
           <a:xfrm>
             <a:off x="804672" y="6007608"/>
-            <a:ext cx="5029200" cy="438912"/>
+            <a:ext cx="5029200" cy="261610"/>
           </a:xfrm>
           <a:prstGeom prst="rect">
             <a:avLst/>
@@ -7788,14 +9545,20 @@
           <a:p>
             <a:pPr algn="l"/>
             <a:r>
-              <a:rPr sz="1000" b="0">
+              <a:rPr lang="en-US" sz="1100" b="1" dirty="0">
                 <a:solidFill>
                   <a:srgbClr val="F5C430"/>
                 </a:solidFill>
                 <a:latin typeface="Calibri"/>
               </a:rPr>
-              <a:t>All cases resolved within policy — workplace stability maintained.</a:t>
-            </a:r>
+              <a:t>Have the issues resolved at zero cost</a:t>
+            </a:r>
+            <a:endParaRPr sz="1100" b="1" dirty="0">
+              <a:solidFill>
+                <a:srgbClr val="F5C430"/>
+              </a:solidFill>
+              <a:latin typeface="Calibri"/>
+            </a:endParaRPr>
           </a:p>
         </p:txBody>
       </p:sp>
@@ -7841,6 +9604,7 @@
           <a:lstStyle/>
           <a:p>
             <a:pPr algn="ctr"/>
+            <a:endParaRPr/>
           </a:p>
         </p:txBody>
       </p:sp>
@@ -7884,6 +9648,7 @@
           <a:lstStyle/>
           <a:p>
             <a:pPr algn="ctr"/>
+            <a:endParaRPr/>
           </a:p>
         </p:txBody>
       </p:sp>
@@ -7965,6 +9730,7 @@
           <a:lstStyle/>
           <a:p>
             <a:pPr algn="ctr"/>
+            <a:endParaRPr/>
           </a:p>
         </p:txBody>
       </p:sp>
@@ -8015,7 +9781,7 @@
         <p:spPr>
           <a:xfrm>
             <a:off x="6611112" y="4526280"/>
-            <a:ext cx="5029200" cy="438912"/>
+            <a:ext cx="5029200" cy="261610"/>
           </a:xfrm>
           <a:prstGeom prst="rect">
             <a:avLst/>
@@ -8033,14 +9799,20 @@
           <a:p>
             <a:pPr algn="l"/>
             <a:r>
-              <a:rPr sz="1000" b="0">
+              <a:rPr lang="en-US" sz="1100" b="1" dirty="0">
                 <a:solidFill>
                   <a:srgbClr val="B0BEC5"/>
                 </a:solidFill>
                 <a:latin typeface="Calibri"/>
               </a:rPr>
-              <a:t>Compliance cases required coordinated cross-functional effort.</a:t>
-            </a:r>
+              <a:t>TA Team was spending a lot of time making sure of re-hire cases.</a:t>
+            </a:r>
+            <a:endParaRPr sz="1100" b="1" dirty="0">
+              <a:solidFill>
+                <a:srgbClr val="B0BEC5"/>
+              </a:solidFill>
+              <a:latin typeface="Calibri"/>
+            </a:endParaRPr>
           </a:p>
         </p:txBody>
       </p:sp>
@@ -8084,6 +9856,7 @@
           <a:lstStyle/>
           <a:p>
             <a:pPr algn="ctr"/>
+            <a:endParaRPr/>
           </a:p>
         </p:txBody>
       </p:sp>
@@ -8134,7 +9907,7 @@
         <p:spPr>
           <a:xfrm>
             <a:off x="6611112" y="5020056"/>
-            <a:ext cx="5029200" cy="438912"/>
+            <a:ext cx="5029200" cy="430887"/>
           </a:xfrm>
           <a:prstGeom prst="rect">
             <a:avLst/>
@@ -8152,14 +9925,20 @@
           <a:p>
             <a:pPr algn="l"/>
             <a:r>
-              <a:rPr sz="1000" b="0">
+              <a:rPr lang="en-US" sz="1100" b="1" dirty="0">
                 <a:solidFill>
                   <a:srgbClr val="B0BEC5"/>
                 </a:solidFill>
                 <a:latin typeface="Calibri"/>
               </a:rPr>
-              <a:t>Navigate legal matters in collaboration with legal &amp; finance teams.</a:t>
-            </a:r>
+              <a:t>Find a solution to support them while saving their time &amp; allowing them to work independently </a:t>
+            </a:r>
+            <a:endParaRPr sz="1100" b="1" dirty="0">
+              <a:solidFill>
+                <a:srgbClr val="B0BEC5"/>
+              </a:solidFill>
+              <a:latin typeface="Calibri"/>
+            </a:endParaRPr>
           </a:p>
         </p:txBody>
       </p:sp>
@@ -8203,6 +9982,7 @@
           <a:lstStyle/>
           <a:p>
             <a:pPr algn="ctr"/>
+            <a:endParaRPr/>
           </a:p>
         </p:txBody>
       </p:sp>
@@ -8253,7 +10033,7 @@
         <p:spPr>
           <a:xfrm>
             <a:off x="6611112" y="5513832"/>
-            <a:ext cx="5029200" cy="438912"/>
+            <a:ext cx="5029200" cy="261610"/>
           </a:xfrm>
           <a:prstGeom prst="rect">
             <a:avLst/>
@@ -8271,14 +10051,20 @@
           <a:p>
             <a:pPr algn="l"/>
             <a:r>
-              <a:rPr sz="1000" b="0">
+              <a:rPr lang="en-US" sz="1100" b="1" dirty="0">
                 <a:solidFill>
                   <a:srgbClr val="B0BEC5"/>
                 </a:solidFill>
                 <a:latin typeface="Calibri"/>
               </a:rPr>
-              <a:t>Led 3 investigations, coordinating with legal and finance departments.</a:t>
-            </a:r>
+              <a:t>Built Employee lookup tool.</a:t>
+            </a:r>
+            <a:endParaRPr sz="1100" b="1" dirty="0">
+              <a:solidFill>
+                <a:srgbClr val="B0BEC5"/>
+              </a:solidFill>
+              <a:latin typeface="Calibri"/>
+            </a:endParaRPr>
           </a:p>
         </p:txBody>
       </p:sp>
@@ -8322,6 +10108,7 @@
           <a:lstStyle/>
           <a:p>
             <a:pPr algn="ctr"/>
+            <a:endParaRPr/>
           </a:p>
         </p:txBody>
       </p:sp>
@@ -8372,7 +10159,7 @@
         <p:spPr>
           <a:xfrm>
             <a:off x="6611112" y="6007608"/>
-            <a:ext cx="5029200" cy="438912"/>
+            <a:ext cx="5029200" cy="261610"/>
           </a:xfrm>
           <a:prstGeom prst="rect">
             <a:avLst/>
@@ -8390,17 +10177,53 @@
           <a:p>
             <a:pPr algn="l"/>
             <a:r>
-              <a:rPr sz="1000" b="0">
+              <a:rPr lang="en-US" sz="1100" b="1" dirty="0">
                 <a:solidFill>
                   <a:srgbClr val="F5C430"/>
                 </a:solidFill>
                 <a:latin typeface="Calibri"/>
               </a:rPr>
-              <a:t>All cases resolved in full compliance with Egyptian labor law.</a:t>
-            </a:r>
-          </a:p>
-        </p:txBody>
-      </p:sp>
+              <a:t>Allow them to have immediate access to check each candidate status!</a:t>
+            </a:r>
+            <a:endParaRPr sz="1100" b="1" dirty="0">
+              <a:solidFill>
+                <a:srgbClr val="F5C430"/>
+              </a:solidFill>
+              <a:latin typeface="Calibri"/>
+            </a:endParaRPr>
+          </a:p>
+        </p:txBody>
+      </p:sp>
+      <p:pic>
+        <p:nvPicPr>
+          <p:cNvPr id="66" name="Picture 65">
+            <a:extLst>
+              <a:ext uri="{FF2B5EF4-FFF2-40B4-BE49-F238E27FC236}">
+                <a16:creationId xmlns:a16="http://schemas.microsoft.com/office/drawing/2014/main" id="{2AA4A14A-8DBE-2EB1-09EE-C6491636F2CF}"/>
+              </a:ext>
+            </a:extLst>
+          </p:cNvPr>
+          <p:cNvPicPr>
+            <a:picLocks noChangeAspect="1"/>
+          </p:cNvPicPr>
+          <p:nvPr/>
+        </p:nvPicPr>
+        <p:blipFill>
+          <a:blip r:embed="rId2"/>
+          <a:stretch>
+            <a:fillRect/>
+          </a:stretch>
+        </p:blipFill>
+        <p:spPr>
+          <a:xfrm>
+            <a:off x="10945933" y="205308"/>
+            <a:ext cx="968134" cy="935736"/>
+          </a:xfrm>
+          <a:prstGeom prst="rect">
+            <a:avLst/>
+          </a:prstGeom>
+        </p:spPr>
+      </p:pic>
     </p:spTree>
   </p:cSld>
   <p:clrMapOvr>
@@ -8409,8 +10232,8 @@
 </p:sld>
 </file>
 
-<file path=ppt/slides/slide5.xml><?xml version="1.0" encoding="utf-8"?>
-<p:sld xmlns:a="http://schemas.openxmlformats.org/drawingml/2006/main" xmlns:p="http://schemas.openxmlformats.org/presentationml/2006/main" xmlns:r="http://schemas.openxmlformats.org/officeDocument/2006/relationships">
+<file path=ppt/slides/slide6.xml><?xml version="1.0" encoding="utf-8"?>
+<p:sld xmlns:a="http://schemas.openxmlformats.org/drawingml/2006/main" xmlns:r="http://schemas.openxmlformats.org/officeDocument/2006/relationships" xmlns:p="http://schemas.openxmlformats.org/presentationml/2006/main">
   <p:cSld>
     <p:bg>
       <p:bgPr>
@@ -8426,7 +10249,14 @@
         <p:cNvGrpSpPr/>
         <p:nvPr/>
       </p:nvGrpSpPr>
-      <p:grpSpPr/>
+      <p:grpSpPr>
+        <a:xfrm>
+          <a:off x="0" y="0"/>
+          <a:ext cx="0" cy="0"/>
+          <a:chOff x="0" y="0"/>
+          <a:chExt cx="0" cy="0"/>
+        </a:xfrm>
+      </p:grpSpPr>
       <p:sp>
         <p:nvSpPr>
           <p:cNvPr id="2" name="TextBox 1"/>
@@ -8474,7 +10304,7 @@
         <p:spPr>
           <a:xfrm>
             <a:off x="457200" y="548640"/>
-            <a:ext cx="10972800" cy="658368"/>
+            <a:ext cx="10972800" cy="553998"/>
           </a:xfrm>
           <a:prstGeom prst="rect">
             <a:avLst/>
@@ -8492,13 +10322,13 @@
           <a:p>
             <a:pPr algn="l"/>
             <a:r>
-              <a:rPr sz="3000" b="1">
+              <a:rPr sz="3000" b="1" dirty="0">
                 <a:solidFill>
                   <a:srgbClr val="FFFFFF"/>
                 </a:solidFill>
                 <a:latin typeface="Calibri"/>
               </a:rPr>
-              <a:t>Looking Back — Honest Self-Assessment</a:t>
+              <a:t>Looking Back —Self-Assessment</a:t>
             </a:r>
           </a:p>
         </p:txBody>
@@ -8543,6 +10373,7 @@
           <a:lstStyle/>
           <a:p>
             <a:pPr algn="ctr"/>
+            <a:endParaRPr/>
           </a:p>
         </p:txBody>
       </p:sp>
@@ -8588,6 +10419,7 @@
           <a:lstStyle/>
           <a:p>
             <a:pPr algn="ctr"/>
+            <a:endParaRPr sz="2000" b="1"/>
           </a:p>
         </p:txBody>
       </p:sp>
@@ -8631,6 +10463,7 @@
           <a:lstStyle/>
           <a:p>
             <a:pPr algn="ctr"/>
+            <a:endParaRPr/>
           </a:p>
         </p:txBody>
       </p:sp>
@@ -8681,7 +10514,7 @@
         <p:spPr>
           <a:xfrm>
             <a:off x="548640" y="1993392"/>
-            <a:ext cx="5120640" cy="292608"/>
+            <a:ext cx="5120640" cy="307777"/>
           </a:xfrm>
           <a:prstGeom prst="rect">
             <a:avLst/>
@@ -8699,7 +10532,7 @@
           <a:p>
             <a:pPr algn="l"/>
             <a:r>
-              <a:rPr sz="1200" b="1">
+              <a:rPr sz="1400" b="1" dirty="0">
                 <a:solidFill>
                   <a:srgbClr val="43A047"/>
                 </a:solidFill>
@@ -8719,7 +10552,7 @@
         <p:spPr>
           <a:xfrm>
             <a:off x="548640" y="2286000"/>
-            <a:ext cx="5120640" cy="384048"/>
+            <a:ext cx="5120640" cy="276999"/>
           </a:xfrm>
           <a:prstGeom prst="rect">
             <a:avLst/>
@@ -8737,9 +10570,9 @@
           <a:p>
             <a:pPr algn="l"/>
             <a:r>
-              <a:rPr sz="1100" b="0">
-                <a:solidFill>
-                  <a:srgbClr val="B0BEC5"/>
+              <a:rPr sz="1200" b="1">
+                <a:solidFill>
+                  <a:schemeClr val="bg1"/>
                 </a:solidFill>
                 <a:latin typeface="Calibri"/>
               </a:rPr>
@@ -8757,7 +10590,7 @@
         <p:spPr>
           <a:xfrm>
             <a:off x="548640" y="2834640"/>
-            <a:ext cx="5120640" cy="292608"/>
+            <a:ext cx="5120640" cy="307777"/>
           </a:xfrm>
           <a:prstGeom prst="rect">
             <a:avLst/>
@@ -8775,7 +10608,7 @@
           <a:p>
             <a:pPr algn="l"/>
             <a:r>
-              <a:rPr sz="1200" b="1">
+              <a:rPr sz="1400" b="1">
                 <a:solidFill>
                   <a:srgbClr val="43A047"/>
                 </a:solidFill>
@@ -8795,7 +10628,7 @@
         <p:spPr>
           <a:xfrm>
             <a:off x="548640" y="3127248"/>
-            <a:ext cx="5120640" cy="384048"/>
+            <a:ext cx="5120640" cy="461665"/>
           </a:xfrm>
           <a:prstGeom prst="rect">
             <a:avLst/>
@@ -8813,9 +10646,9 @@
           <a:p>
             <a:pPr algn="l"/>
             <a:r>
-              <a:rPr sz="1100" b="0">
-                <a:solidFill>
-                  <a:srgbClr val="B0BEC5"/>
+              <a:rPr sz="1200" b="1">
+                <a:solidFill>
+                  <a:schemeClr val="bg1"/>
                 </a:solidFill>
                 <a:latin typeface="Calibri"/>
               </a:rPr>
@@ -8833,7 +10666,7 @@
         <p:spPr>
           <a:xfrm>
             <a:off x="548640" y="3675888"/>
-            <a:ext cx="5120640" cy="292608"/>
+            <a:ext cx="5120640" cy="307777"/>
           </a:xfrm>
           <a:prstGeom prst="rect">
             <a:avLst/>
@@ -8851,7 +10684,7 @@
           <a:p>
             <a:pPr algn="l"/>
             <a:r>
-              <a:rPr sz="1200" b="1">
+              <a:rPr sz="1400" b="1">
                 <a:solidFill>
                   <a:srgbClr val="43A047"/>
                 </a:solidFill>
@@ -8871,7 +10704,7 @@
         <p:spPr>
           <a:xfrm>
             <a:off x="548640" y="3968496"/>
-            <a:ext cx="5120640" cy="384048"/>
+            <a:ext cx="5120640" cy="276999"/>
           </a:xfrm>
           <a:prstGeom prst="rect">
             <a:avLst/>
@@ -8889,9 +10722,9 @@
           <a:p>
             <a:pPr algn="l"/>
             <a:r>
-              <a:rPr sz="1100" b="0">
-                <a:solidFill>
-                  <a:srgbClr val="B0BEC5"/>
+              <a:rPr sz="1200" b="1">
+                <a:solidFill>
+                  <a:schemeClr val="bg1"/>
                 </a:solidFill>
                 <a:latin typeface="Calibri"/>
               </a:rPr>
@@ -8909,7 +10742,7 @@
         <p:spPr>
           <a:xfrm>
             <a:off x="548640" y="4517136"/>
-            <a:ext cx="5120640" cy="292608"/>
+            <a:ext cx="5120640" cy="307777"/>
           </a:xfrm>
           <a:prstGeom prst="rect">
             <a:avLst/>
@@ -8927,7 +10760,7 @@
           <a:p>
             <a:pPr algn="l"/>
             <a:r>
-              <a:rPr sz="1200" b="1">
+              <a:rPr sz="1400" b="1">
                 <a:solidFill>
                   <a:srgbClr val="43A047"/>
                 </a:solidFill>
@@ -8947,7 +10780,7 @@
         <p:spPr>
           <a:xfrm>
             <a:off x="548640" y="4809744"/>
-            <a:ext cx="5120640" cy="384048"/>
+            <a:ext cx="5120640" cy="276999"/>
           </a:xfrm>
           <a:prstGeom prst="rect">
             <a:avLst/>
@@ -8965,9 +10798,9 @@
           <a:p>
             <a:pPr algn="l"/>
             <a:r>
-              <a:rPr sz="1100" b="0">
-                <a:solidFill>
-                  <a:srgbClr val="B0BEC5"/>
+              <a:rPr sz="1200" b="1">
+                <a:solidFill>
+                  <a:schemeClr val="bg1"/>
                 </a:solidFill>
                 <a:latin typeface="Calibri"/>
               </a:rPr>
@@ -9018,6 +10851,7 @@
           <a:lstStyle/>
           <a:p>
             <a:pPr algn="ctr"/>
+            <a:endParaRPr/>
           </a:p>
         </p:txBody>
       </p:sp>
@@ -9061,6 +10895,7 @@
           <a:lstStyle/>
           <a:p>
             <a:pPr algn="ctr"/>
+            <a:endParaRPr/>
           </a:p>
         </p:txBody>
       </p:sp>
@@ -9111,7 +10946,7 @@
         <p:spPr>
           <a:xfrm>
             <a:off x="6400800" y="1993392"/>
-            <a:ext cx="5303520" cy="292608"/>
+            <a:ext cx="5303520" cy="307777"/>
           </a:xfrm>
           <a:prstGeom prst="rect">
             <a:avLst/>
@@ -9129,14 +10964,29 @@
           <a:p>
             <a:pPr algn="l"/>
             <a:r>
-              <a:rPr sz="1200" b="1">
+              <a:rPr sz="1400" b="1" dirty="0">
                 <a:solidFill>
                   <a:srgbClr val="F5C430"/>
                 </a:solidFill>
                 <a:latin typeface="Calibri"/>
               </a:rPr>
-              <a:t>▸  Accelerate knowledge acquisition</a:t>
-            </a:r>
+              <a:t>▸  </a:t>
+            </a:r>
+            <a:r>
+              <a:rPr lang="en-US" sz="1400" b="1" dirty="0">
+                <a:solidFill>
+                  <a:srgbClr val="F5C430"/>
+                </a:solidFill>
+                <a:latin typeface="Calibri"/>
+              </a:rPr>
+              <a:t>Accelerate knowledge acquisition</a:t>
+            </a:r>
+            <a:endParaRPr sz="1400" b="1" dirty="0">
+              <a:solidFill>
+                <a:srgbClr val="F5C430"/>
+              </a:solidFill>
+              <a:latin typeface="Calibri"/>
+            </a:endParaRPr>
           </a:p>
         </p:txBody>
       </p:sp>
@@ -9149,7 +10999,7 @@
         <p:spPr>
           <a:xfrm>
             <a:off x="6400800" y="2286000"/>
-            <a:ext cx="5303520" cy="438912"/>
+            <a:ext cx="5303520" cy="461665"/>
           </a:xfrm>
           <a:prstGeom prst="rect">
             <a:avLst/>
@@ -9167,9 +11017,9 @@
           <a:p>
             <a:pPr algn="l"/>
             <a:r>
-              <a:rPr sz="1100" b="0">
-                <a:solidFill>
-                  <a:srgbClr val="B0BEC5"/>
+              <a:rPr sz="1200" b="1" dirty="0">
+                <a:solidFill>
+                  <a:schemeClr val="bg1"/>
                 </a:solidFill>
                 <a:latin typeface="Calibri"/>
               </a:rPr>
@@ -9187,7 +11037,7 @@
         <p:spPr>
           <a:xfrm>
             <a:off x="6400800" y="2862072"/>
-            <a:ext cx="5303520" cy="292608"/>
+            <a:ext cx="5303520" cy="307777"/>
           </a:xfrm>
           <a:prstGeom prst="rect">
             <a:avLst/>
@@ -9205,14 +11055,29 @@
           <a:p>
             <a:pPr algn="l"/>
             <a:r>
-              <a:rPr sz="1200" b="1">
+              <a:rPr sz="1400" b="1" dirty="0">
                 <a:solidFill>
                   <a:srgbClr val="F5C430"/>
                 </a:solidFill>
                 <a:latin typeface="Calibri"/>
               </a:rPr>
-              <a:t>▸  Build management trust earlier</a:t>
-            </a:r>
+              <a:t>▸  </a:t>
+            </a:r>
+            <a:r>
+              <a:rPr lang="en-US" sz="1400" b="1" dirty="0">
+                <a:solidFill>
+                  <a:srgbClr val="F5C430"/>
+                </a:solidFill>
+                <a:latin typeface="Calibri"/>
+              </a:rPr>
+              <a:t>Spend More time in communications</a:t>
+            </a:r>
+            <a:endParaRPr sz="1400" b="1" dirty="0">
+              <a:solidFill>
+                <a:srgbClr val="F5C430"/>
+              </a:solidFill>
+              <a:latin typeface="Calibri"/>
+            </a:endParaRPr>
           </a:p>
         </p:txBody>
       </p:sp>
@@ -9225,7 +11090,7 @@
         <p:spPr>
           <a:xfrm>
             <a:off x="6400800" y="3154680"/>
-            <a:ext cx="5303520" cy="438912"/>
+            <a:ext cx="5303520" cy="461665"/>
           </a:xfrm>
           <a:prstGeom prst="rect">
             <a:avLst/>
@@ -9243,9 +11108,9 @@
           <a:p>
             <a:pPr algn="l"/>
             <a:r>
-              <a:rPr sz="1100" b="0">
-                <a:solidFill>
-                  <a:srgbClr val="B0BEC5"/>
+              <a:rPr sz="1200" b="1" dirty="0">
+                <a:solidFill>
+                  <a:schemeClr val="bg1"/>
                 </a:solidFill>
                 <a:latin typeface="Calibri"/>
               </a:rPr>
@@ -9256,14 +11121,14 @@
       </p:sp>
       <p:sp>
         <p:nvSpPr>
-          <p:cNvPr id="23" name="TextBox 22"/>
+          <p:cNvPr id="25" name="TextBox 24"/>
           <p:cNvSpPr txBox="1"/>
           <p:nvPr/>
         </p:nvSpPr>
         <p:spPr>
           <a:xfrm>
-            <a:off x="6400800" y="3730752"/>
-            <a:ext cx="5303520" cy="292608"/>
+            <a:off x="6400800" y="3532626"/>
+            <a:ext cx="5303520" cy="307777"/>
           </a:xfrm>
           <a:prstGeom prst="rect">
             <a:avLst/>
@@ -9281,27 +11146,27 @@
           <a:p>
             <a:pPr algn="l"/>
             <a:r>
-              <a:rPr sz="1200" b="1">
+              <a:rPr sz="1400" b="1" dirty="0">
                 <a:solidFill>
                   <a:srgbClr val="F5C430"/>
                 </a:solidFill>
                 <a:latin typeface="Calibri"/>
               </a:rPr>
-              <a:t>▸  Implement systems sooner</a:t>
-            </a:r>
-          </a:p>
-        </p:txBody>
-      </p:sp>
-      <p:sp>
-        <p:nvSpPr>
-          <p:cNvPr id="24" name="TextBox 23"/>
+              <a:t>▸  Invest more in Chinese</a:t>
+            </a:r>
+          </a:p>
+        </p:txBody>
+      </p:sp>
+      <p:sp>
+        <p:nvSpPr>
+          <p:cNvPr id="26" name="TextBox 25"/>
           <p:cNvSpPr txBox="1"/>
           <p:nvPr/>
         </p:nvSpPr>
         <p:spPr>
           <a:xfrm>
-            <a:off x="6400800" y="4023360"/>
-            <a:ext cx="5303520" cy="438912"/>
+            <a:off x="6400800" y="3825234"/>
+            <a:ext cx="5303520" cy="461665"/>
           </a:xfrm>
           <a:prstGeom prst="rect">
             <a:avLst/>
@@ -9319,85 +11184,9 @@
           <a:p>
             <a:pPr algn="l"/>
             <a:r>
-              <a:rPr sz="1100" b="0">
-                <a:solidFill>
-                  <a:srgbClr val="B0BEC5"/>
-                </a:solidFill>
-                <a:latin typeface="Calibri"/>
-              </a:rPr>
-              <a:t>   The automation and iTalent projects showed clear value — earlier implementation means earlier impact.</a:t>
-            </a:r>
-          </a:p>
-        </p:txBody>
-      </p:sp>
-      <p:sp>
-        <p:nvSpPr>
-          <p:cNvPr id="25" name="TextBox 24"/>
-          <p:cNvSpPr txBox="1"/>
-          <p:nvPr/>
-        </p:nvSpPr>
-        <p:spPr>
-          <a:xfrm>
-            <a:off x="6400800" y="4599432"/>
-            <a:ext cx="5303520" cy="292608"/>
-          </a:xfrm>
-          <a:prstGeom prst="rect">
-            <a:avLst/>
-          </a:prstGeom>
-          <a:noFill/>
-          <a:ln>
-            <a:noFill/>
-          </a:ln>
-        </p:spPr>
-        <p:txBody>
-          <a:bodyPr wrap="square">
-            <a:spAutoFit/>
-          </a:bodyPr>
-          <a:lstStyle/>
-          <a:p>
-            <a:pPr algn="l"/>
-            <a:r>
-              <a:rPr sz="1200" b="1">
-                <a:solidFill>
-                  <a:srgbClr val="F5C430"/>
-                </a:solidFill>
-                <a:latin typeface="Calibri"/>
-              </a:rPr>
-              <a:t>▸  Invest more in Chinese</a:t>
-            </a:r>
-          </a:p>
-        </p:txBody>
-      </p:sp>
-      <p:sp>
-        <p:nvSpPr>
-          <p:cNvPr id="26" name="TextBox 25"/>
-          <p:cNvSpPr txBox="1"/>
-          <p:nvPr/>
-        </p:nvSpPr>
-        <p:spPr>
-          <a:xfrm>
-            <a:off x="6400800" y="4892040"/>
-            <a:ext cx="5303520" cy="438912"/>
-          </a:xfrm>
-          <a:prstGeom prst="rect">
-            <a:avLst/>
-          </a:prstGeom>
-          <a:noFill/>
-          <a:ln>
-            <a:noFill/>
-          </a:ln>
-        </p:spPr>
-        <p:txBody>
-          <a:bodyPr wrap="square">
-            <a:spAutoFit/>
-          </a:bodyPr>
-          <a:lstStyle/>
-          <a:p>
-            <a:pPr algn="l"/>
-            <a:r>
-              <a:rPr sz="1100" b="0">
-                <a:solidFill>
-                  <a:srgbClr val="B0BEC5"/>
+              <a:rPr sz="1200" b="1" dirty="0">
+                <a:solidFill>
+                  <a:schemeClr val="bg1"/>
                 </a:solidFill>
                 <a:latin typeface="Calibri"/>
               </a:rPr>
@@ -9406,6 +11195,36 @@
           </a:p>
         </p:txBody>
       </p:sp>
+      <p:pic>
+        <p:nvPicPr>
+          <p:cNvPr id="28" name="Picture 27">
+            <a:extLst>
+              <a:ext uri="{FF2B5EF4-FFF2-40B4-BE49-F238E27FC236}">
+                <a16:creationId xmlns:a16="http://schemas.microsoft.com/office/drawing/2014/main" id="{E7DE7CD0-242D-AB75-98EB-4840281C1E63}"/>
+              </a:ext>
+            </a:extLst>
+          </p:cNvPr>
+          <p:cNvPicPr>
+            <a:picLocks noChangeAspect="1"/>
+          </p:cNvPicPr>
+          <p:nvPr/>
+        </p:nvPicPr>
+        <p:blipFill>
+          <a:blip r:embed="rId2"/>
+          <a:stretch>
+            <a:fillRect/>
+          </a:stretch>
+        </p:blipFill>
+        <p:spPr>
+          <a:xfrm>
+            <a:off x="10945933" y="205308"/>
+            <a:ext cx="968134" cy="935736"/>
+          </a:xfrm>
+          <a:prstGeom prst="rect">
+            <a:avLst/>
+          </a:prstGeom>
+        </p:spPr>
+      </p:pic>
     </p:spTree>
   </p:cSld>
   <p:clrMapOvr>
@@ -9414,8 +11233,8 @@
 </p:sld>
 </file>
 
-<file path=ppt/slides/slide6.xml><?xml version="1.0" encoding="utf-8"?>
-<p:sld xmlns:a="http://schemas.openxmlformats.org/drawingml/2006/main" xmlns:p="http://schemas.openxmlformats.org/presentationml/2006/main" xmlns:r="http://schemas.openxmlformats.org/officeDocument/2006/relationships">
+<file path=ppt/slides/slide7.xml><?xml version="1.0" encoding="utf-8"?>
+<p:sld xmlns:a="http://schemas.openxmlformats.org/drawingml/2006/main" xmlns:r="http://schemas.openxmlformats.org/officeDocument/2006/relationships" xmlns:p="http://schemas.openxmlformats.org/presentationml/2006/main">
   <p:cSld>
     <p:bg>
       <p:bgPr>
@@ -9431,7 +11250,14 @@
         <p:cNvGrpSpPr/>
         <p:nvPr/>
       </p:nvGrpSpPr>
-      <p:grpSpPr/>
+      <p:grpSpPr>
+        <a:xfrm>
+          <a:off x="0" y="0"/>
+          <a:ext cx="0" cy="0"/>
+          <a:chOff x="0" y="0"/>
+          <a:chExt cx="0" cy="0"/>
+        </a:xfrm>
+      </p:grpSpPr>
       <p:sp>
         <p:nvSpPr>
           <p:cNvPr id="2" name="TextBox 1"/>
@@ -9548,6 +11374,7 @@
           <a:lstStyle/>
           <a:p>
             <a:pPr algn="ctr"/>
+            <a:endParaRPr/>
           </a:p>
         </p:txBody>
       </p:sp>
@@ -9629,6 +11456,7 @@
           <a:lstStyle/>
           <a:p>
             <a:pPr algn="ctr"/>
+            <a:endParaRPr sz="2000" b="1"/>
           </a:p>
         </p:txBody>
       </p:sp>
@@ -9641,7 +11469,7 @@
         <p:spPr>
           <a:xfrm>
             <a:off x="457200" y="1945640"/>
-            <a:ext cx="320040" cy="320040"/>
+            <a:ext cx="320040" cy="307777"/>
           </a:xfrm>
           <a:prstGeom prst="rect">
             <a:avLst/>
@@ -9659,7 +11487,7 @@
           <a:p>
             <a:pPr algn="ctr"/>
             <a:r>
-              <a:rPr sz="1200" b="1">
+              <a:rPr sz="1400" b="1">
                 <a:solidFill>
                   <a:srgbClr val="1B2A5C"/>
                 </a:solidFill>
@@ -9679,7 +11507,7 @@
         <p:spPr>
           <a:xfrm>
             <a:off x="914400" y="1920240"/>
-            <a:ext cx="6400800" cy="292608"/>
+            <a:ext cx="6400800" cy="307777"/>
           </a:xfrm>
           <a:prstGeom prst="rect">
             <a:avLst/>
@@ -9697,7 +11525,7 @@
           <a:p>
             <a:pPr algn="l"/>
             <a:r>
-              <a:rPr sz="1300" b="1">
+              <a:rPr sz="1400" b="1">
                 <a:solidFill>
                   <a:srgbClr val="FFFFFF"/>
                 </a:solidFill>
@@ -9717,7 +11545,7 @@
         <p:spPr>
           <a:xfrm>
             <a:off x="914400" y="2221992"/>
-            <a:ext cx="6400800" cy="384048"/>
+            <a:ext cx="6400800" cy="461665"/>
           </a:xfrm>
           <a:prstGeom prst="rect">
             <a:avLst/>
@@ -9735,7 +11563,7 @@
           <a:p>
             <a:pPr algn="l"/>
             <a:r>
-              <a:rPr sz="1100" b="0">
+              <a:rPr sz="1200" b="1">
                 <a:solidFill>
                   <a:srgbClr val="B0BEC5"/>
                 </a:solidFill>
@@ -9786,6 +11614,7 @@
           <a:lstStyle/>
           <a:p>
             <a:pPr algn="ctr"/>
+            <a:endParaRPr sz="2000" b="1"/>
           </a:p>
         </p:txBody>
       </p:sp>
@@ -9798,7 +11627,7 @@
         <p:spPr>
           <a:xfrm>
             <a:off x="457200" y="2768600"/>
-            <a:ext cx="320040" cy="320040"/>
+            <a:ext cx="320040" cy="307777"/>
           </a:xfrm>
           <a:prstGeom prst="rect">
             <a:avLst/>
@@ -9816,7 +11645,7 @@
           <a:p>
             <a:pPr algn="ctr"/>
             <a:r>
-              <a:rPr sz="1200" b="1">
+              <a:rPr sz="1400" b="1">
                 <a:solidFill>
                   <a:srgbClr val="1B2A5C"/>
                 </a:solidFill>
@@ -9836,7 +11665,7 @@
         <p:spPr>
           <a:xfrm>
             <a:off x="914400" y="2743200"/>
-            <a:ext cx="6400800" cy="292608"/>
+            <a:ext cx="6400800" cy="307777"/>
           </a:xfrm>
           <a:prstGeom prst="rect">
             <a:avLst/>
@@ -9854,7 +11683,7 @@
           <a:p>
             <a:pPr algn="l"/>
             <a:r>
-              <a:rPr sz="1300" b="1">
+              <a:rPr sz="1400" b="1">
                 <a:solidFill>
                   <a:srgbClr val="FFFFFF"/>
                 </a:solidFill>
@@ -9874,7 +11703,7 @@
         <p:spPr>
           <a:xfrm>
             <a:off x="914400" y="3044952"/>
-            <a:ext cx="6400800" cy="384048"/>
+            <a:ext cx="6400800" cy="461665"/>
           </a:xfrm>
           <a:prstGeom prst="rect">
             <a:avLst/>
@@ -9892,7 +11721,7 @@
           <a:p>
             <a:pPr algn="l"/>
             <a:r>
-              <a:rPr sz="1100" b="0">
+              <a:rPr sz="1200" b="1">
                 <a:solidFill>
                   <a:srgbClr val="B0BEC5"/>
                 </a:solidFill>
@@ -9943,6 +11772,7 @@
           <a:lstStyle/>
           <a:p>
             <a:pPr algn="ctr"/>
+            <a:endParaRPr sz="2000" b="1"/>
           </a:p>
         </p:txBody>
       </p:sp>
@@ -9955,7 +11785,7 @@
         <p:spPr>
           <a:xfrm>
             <a:off x="457200" y="3591560"/>
-            <a:ext cx="320040" cy="320040"/>
+            <a:ext cx="320040" cy="307777"/>
           </a:xfrm>
           <a:prstGeom prst="rect">
             <a:avLst/>
@@ -9973,7 +11803,7 @@
           <a:p>
             <a:pPr algn="ctr"/>
             <a:r>
-              <a:rPr sz="1200" b="1">
+              <a:rPr sz="1400" b="1">
                 <a:solidFill>
                   <a:srgbClr val="1B2A5C"/>
                 </a:solidFill>
@@ -9993,7 +11823,7 @@
         <p:spPr>
           <a:xfrm>
             <a:off x="914400" y="3566160"/>
-            <a:ext cx="6400800" cy="292608"/>
+            <a:ext cx="6400800" cy="307777"/>
           </a:xfrm>
           <a:prstGeom prst="rect">
             <a:avLst/>
@@ -10011,7 +11841,7 @@
           <a:p>
             <a:pPr algn="l"/>
             <a:r>
-              <a:rPr sz="1300" b="1">
+              <a:rPr sz="1400" b="1">
                 <a:solidFill>
                   <a:srgbClr val="FFFFFF"/>
                 </a:solidFill>
@@ -10031,7 +11861,7 @@
         <p:spPr>
           <a:xfrm>
             <a:off x="914400" y="3867912"/>
-            <a:ext cx="6400800" cy="384048"/>
+            <a:ext cx="6400800" cy="461665"/>
           </a:xfrm>
           <a:prstGeom prst="rect">
             <a:avLst/>
@@ -10049,7 +11879,7 @@
           <a:p>
             <a:pPr algn="l"/>
             <a:r>
-              <a:rPr sz="1100" b="0">
+              <a:rPr sz="1200" b="1">
                 <a:solidFill>
                   <a:srgbClr val="B0BEC5"/>
                 </a:solidFill>
@@ -10100,6 +11930,7 @@
           <a:lstStyle/>
           <a:p>
             <a:pPr algn="ctr"/>
+            <a:endParaRPr sz="2000" b="1"/>
           </a:p>
         </p:txBody>
       </p:sp>
@@ -10112,7 +11943,7 @@
         <p:spPr>
           <a:xfrm>
             <a:off x="457200" y="4414520"/>
-            <a:ext cx="320040" cy="320040"/>
+            <a:ext cx="320040" cy="307777"/>
           </a:xfrm>
           <a:prstGeom prst="rect">
             <a:avLst/>
@@ -10130,7 +11961,7 @@
           <a:p>
             <a:pPr algn="ctr"/>
             <a:r>
-              <a:rPr sz="1200" b="1">
+              <a:rPr sz="1400" b="1">
                 <a:solidFill>
                   <a:srgbClr val="1B2A5C"/>
                 </a:solidFill>
@@ -10150,7 +11981,7 @@
         <p:spPr>
           <a:xfrm>
             <a:off x="914400" y="4389120"/>
-            <a:ext cx="6400800" cy="292608"/>
+            <a:ext cx="6400800" cy="307777"/>
           </a:xfrm>
           <a:prstGeom prst="rect">
             <a:avLst/>
@@ -10168,7 +11999,7 @@
           <a:p>
             <a:pPr algn="l"/>
             <a:r>
-              <a:rPr sz="1300" b="1">
+              <a:rPr sz="1400" b="1">
                 <a:solidFill>
                   <a:srgbClr val="FFFFFF"/>
                 </a:solidFill>
@@ -10188,7 +12019,7 @@
         <p:spPr>
           <a:xfrm>
             <a:off x="914400" y="4690872"/>
-            <a:ext cx="6400800" cy="384048"/>
+            <a:ext cx="6400800" cy="461665"/>
           </a:xfrm>
           <a:prstGeom prst="rect">
             <a:avLst/>
@@ -10206,7 +12037,7 @@
           <a:p>
             <a:pPr algn="l"/>
             <a:r>
-              <a:rPr sz="1100" b="0">
+              <a:rPr sz="1200" b="1">
                 <a:solidFill>
                   <a:srgbClr val="B0BEC5"/>
                 </a:solidFill>
@@ -10259,6 +12090,7 @@
           <a:lstStyle/>
           <a:p>
             <a:pPr algn="ctr"/>
+            <a:endParaRPr/>
           </a:p>
         </p:txBody>
       </p:sp>
@@ -10302,6 +12134,7 @@
           <a:lstStyle/>
           <a:p>
             <a:pPr algn="ctr"/>
+            <a:endParaRPr/>
           </a:p>
         </p:txBody>
       </p:sp>
@@ -10352,7 +12185,7 @@
         <p:spPr>
           <a:xfrm>
             <a:off x="7955279" y="1965960"/>
-            <a:ext cx="3749039" cy="320040"/>
+            <a:ext cx="3749039" cy="307777"/>
           </a:xfrm>
           <a:prstGeom prst="rect">
             <a:avLst/>
@@ -10370,14 +12203,47 @@
           <a:p>
             <a:pPr algn="l"/>
             <a:r>
-              <a:rPr sz="1200" b="1">
+              <a:rPr sz="1400" b="1" dirty="0">
                 <a:solidFill>
                   <a:srgbClr val="F5C430"/>
                 </a:solidFill>
                 <a:latin typeface="Calibri"/>
               </a:rPr>
-              <a:t>▸  Claude AI — Max Subscription</a:t>
-            </a:r>
+              <a:t>▸  AI —</a:t>
+            </a:r>
+            <a:r>
+              <a:rPr lang="en-US" sz="1400" b="1" dirty="0">
+                <a:solidFill>
+                  <a:srgbClr val="F5C430"/>
+                </a:solidFill>
+                <a:latin typeface="Calibri"/>
+              </a:rPr>
+              <a:t> </a:t>
+            </a:r>
+            <a:r>
+              <a:rPr sz="1400" b="1" dirty="0">
+                <a:solidFill>
+                  <a:srgbClr val="F5C430"/>
+                </a:solidFill>
+                <a:latin typeface="Calibri"/>
+              </a:rPr>
+              <a:t>Subscription</a:t>
+            </a:r>
+            <a:r>
+              <a:rPr lang="en-US" sz="1400" b="1" dirty="0">
+                <a:solidFill>
+                  <a:srgbClr val="F5C430"/>
+                </a:solidFill>
+                <a:latin typeface="Calibri"/>
+              </a:rPr>
+              <a:t> Upgrade</a:t>
+            </a:r>
+            <a:endParaRPr sz="1400" b="1" dirty="0">
+              <a:solidFill>
+                <a:srgbClr val="F5C430"/>
+              </a:solidFill>
+              <a:latin typeface="Calibri"/>
+            </a:endParaRPr>
           </a:p>
         </p:txBody>
       </p:sp>
@@ -10390,7 +12256,7 @@
         <p:spPr>
           <a:xfrm>
             <a:off x="7955279" y="2295144"/>
-            <a:ext cx="3749039" cy="777240"/>
+            <a:ext cx="3749039" cy="830997"/>
           </a:xfrm>
           <a:prstGeom prst="rect">
             <a:avLst/>
@@ -10408,14 +12274,29 @@
           <a:p>
             <a:pPr algn="l"/>
             <a:r>
-              <a:rPr sz="1100" b="0">
-                <a:solidFill>
-                  <a:srgbClr val="B0BEC5"/>
-                </a:solidFill>
-                <a:latin typeface="Calibri"/>
-              </a:rPr>
-              <a:t>Required to continue building and scaling HR automation and AI projects that benefit the entire HR department.</a:t>
-            </a:r>
+              <a:rPr sz="1200" b="1" dirty="0">
+                <a:solidFill>
+                  <a:schemeClr val="bg1"/>
+                </a:solidFill>
+                <a:latin typeface="Calibri"/>
+              </a:rPr>
+              <a:t>Required to continue building and scaling HR automation and AI projects that benefit the entire HR department</a:t>
+            </a:r>
+            <a:r>
+              <a:rPr lang="en-US" sz="1200" b="1" dirty="0">
+                <a:solidFill>
+                  <a:schemeClr val="bg1"/>
+                </a:solidFill>
+                <a:latin typeface="Calibri"/>
+              </a:rPr>
+              <a:t>. Will need to upgrade my subscription to Max Plan with 100$/month</a:t>
+            </a:r>
+            <a:endParaRPr sz="1200" b="1" dirty="0">
+              <a:solidFill>
+                <a:schemeClr val="bg1"/>
+              </a:solidFill>
+              <a:latin typeface="Calibri"/>
+            </a:endParaRPr>
           </a:p>
         </p:txBody>
       </p:sp>
@@ -10428,7 +12309,7 @@
         <p:spPr>
           <a:xfrm>
             <a:off x="7955279" y="3291840"/>
-            <a:ext cx="3749039" cy="320040"/>
+            <a:ext cx="3749039" cy="307777"/>
           </a:xfrm>
           <a:prstGeom prst="rect">
             <a:avLst/>
@@ -10446,14 +12327,29 @@
           <a:p>
             <a:pPr algn="l"/>
             <a:r>
-              <a:rPr sz="1200" b="1">
+              <a:rPr sz="1400" b="1" dirty="0">
                 <a:solidFill>
                   <a:srgbClr val="F5C430"/>
                 </a:solidFill>
                 <a:latin typeface="Calibri"/>
               </a:rPr>
-              <a:t>▸  Broader System Access</a:t>
-            </a:r>
+              <a:t>▸  </a:t>
+            </a:r>
+            <a:r>
+              <a:rPr lang="en-US" sz="1400" b="1" dirty="0">
+                <a:solidFill>
+                  <a:srgbClr val="F5C430"/>
+                </a:solidFill>
+                <a:latin typeface="Calibri"/>
+              </a:rPr>
+              <a:t>Business Laptop Upgrade</a:t>
+            </a:r>
+            <a:endParaRPr sz="1400" b="1" dirty="0">
+              <a:solidFill>
+                <a:srgbClr val="F5C430"/>
+              </a:solidFill>
+              <a:latin typeface="Calibri"/>
+            </a:endParaRPr>
           </a:p>
         </p:txBody>
       </p:sp>
@@ -10466,7 +12362,7 @@
         <p:spPr>
           <a:xfrm>
             <a:off x="7955279" y="3621024"/>
-            <a:ext cx="3749039" cy="777240"/>
+            <a:ext cx="3749039" cy="461665"/>
           </a:xfrm>
           <a:prstGeom prst="rect">
             <a:avLst/>
@@ -10484,17 +12380,53 @@
           <a:p>
             <a:pPr algn="l"/>
             <a:r>
-              <a:rPr sz="1100" b="0">
-                <a:solidFill>
-                  <a:srgbClr val="B0BEC5"/>
-                </a:solidFill>
-                <a:latin typeface="Calibri"/>
-              </a:rPr>
-              <a:t>Access to relevant HR and operational systems to enable deeper analytics and automation capabilities.</a:t>
-            </a:r>
-          </a:p>
-        </p:txBody>
-      </p:sp>
+              <a:rPr lang="en-US" sz="1200" b="1" dirty="0">
+                <a:solidFill>
+                  <a:schemeClr val="bg1"/>
+                </a:solidFill>
+                <a:latin typeface="Calibri"/>
+              </a:rPr>
+              <a:t>Upgrading the laptop RAM with extra 32GB will accelerate the processes and make things smoother.</a:t>
+            </a:r>
+            <a:endParaRPr sz="1200" b="1" dirty="0">
+              <a:solidFill>
+                <a:schemeClr val="bg1"/>
+              </a:solidFill>
+              <a:latin typeface="Calibri"/>
+            </a:endParaRPr>
+          </a:p>
+        </p:txBody>
+      </p:sp>
+      <p:pic>
+        <p:nvPicPr>
+          <p:cNvPr id="30" name="Picture 29">
+            <a:extLst>
+              <a:ext uri="{FF2B5EF4-FFF2-40B4-BE49-F238E27FC236}">
+                <a16:creationId xmlns:a16="http://schemas.microsoft.com/office/drawing/2014/main" id="{24B5C9DD-8F8E-03B0-C7AC-65C84AA70E80}"/>
+              </a:ext>
+            </a:extLst>
+          </p:cNvPr>
+          <p:cNvPicPr>
+            <a:picLocks noChangeAspect="1"/>
+          </p:cNvPicPr>
+          <p:nvPr/>
+        </p:nvPicPr>
+        <p:blipFill>
+          <a:blip r:embed="rId2"/>
+          <a:stretch>
+            <a:fillRect/>
+          </a:stretch>
+        </p:blipFill>
+        <p:spPr>
+          <a:xfrm>
+            <a:off x="10945933" y="205308"/>
+            <a:ext cx="968134" cy="935736"/>
+          </a:xfrm>
+          <a:prstGeom prst="rect">
+            <a:avLst/>
+          </a:prstGeom>
+        </p:spPr>
+      </p:pic>
     </p:spTree>
   </p:cSld>
   <p:clrMapOvr>
@@ -10503,8 +12435,8 @@
 </p:sld>
 </file>
 
-<file path=ppt/slides/slide7.xml><?xml version="1.0" encoding="utf-8"?>
-<p:sld xmlns:a="http://schemas.openxmlformats.org/drawingml/2006/main" xmlns:p="http://schemas.openxmlformats.org/presentationml/2006/main" xmlns:r="http://schemas.openxmlformats.org/officeDocument/2006/relationships">
+<file path=ppt/slides/slide8.xml><?xml version="1.0" encoding="utf-8"?>
+<p:sld xmlns:a="http://schemas.openxmlformats.org/drawingml/2006/main" xmlns:r="http://schemas.openxmlformats.org/officeDocument/2006/relationships" xmlns:p="http://schemas.openxmlformats.org/presentationml/2006/main">
   <p:cSld>
     <p:bg>
       <p:bgPr>
@@ -10520,7 +12452,14 @@
         <p:cNvGrpSpPr/>
         <p:nvPr/>
       </p:nvGrpSpPr>
-      <p:grpSpPr/>
+      <p:grpSpPr>
+        <a:xfrm>
+          <a:off x="0" y="0"/>
+          <a:ext cx="0" cy="0"/>
+          <a:chOff x="0" y="0"/>
+          <a:chExt cx="0" cy="0"/>
+        </a:xfrm>
+      </p:grpSpPr>
       <p:sp>
         <p:nvSpPr>
           <p:cNvPr id="2" name="Rectangle 1"/>
@@ -10561,6 +12500,7 @@
           <a:lstStyle/>
           <a:p>
             <a:pPr algn="ctr"/>
+            <a:endParaRPr/>
           </a:p>
         </p:txBody>
       </p:sp>
@@ -10604,6 +12544,7 @@
           <a:lstStyle/>
           <a:p>
             <a:pPr algn="ctr"/>
+            <a:endParaRPr/>
           </a:p>
         </p:txBody>
       </p:sp>
@@ -10647,6 +12588,7 @@
           <a:lstStyle/>
           <a:p>
             <a:pPr algn="ctr"/>
+            <a:endParaRPr/>
           </a:p>
         </p:txBody>
       </p:sp>
@@ -10690,6 +12632,7 @@
           <a:lstStyle/>
           <a:p>
             <a:pPr algn="ctr"/>
+            <a:endParaRPr/>
           </a:p>
         </p:txBody>
       </p:sp>
@@ -10733,6 +12676,7 @@
           <a:lstStyle/>
           <a:p>
             <a:pPr algn="ctr"/>
+            <a:endParaRPr/>
           </a:p>
         </p:txBody>
       </p:sp>
@@ -10776,6 +12720,7 @@
           <a:lstStyle/>
           <a:p>
             <a:pPr algn="ctr"/>
+            <a:endParaRPr/>
           </a:p>
         </p:txBody>
       </p:sp>
@@ -10819,6 +12764,7 @@
           <a:lstStyle/>
           <a:p>
             <a:pPr algn="ctr"/>
+            <a:endParaRPr/>
           </a:p>
         </p:txBody>
       </p:sp>
@@ -10862,6 +12808,7 @@
           <a:lstStyle/>
           <a:p>
             <a:pPr algn="ctr"/>
+            <a:endParaRPr/>
           </a:p>
         </p:txBody>
       </p:sp>
@@ -10905,6 +12852,7 @@
           <a:lstStyle/>
           <a:p>
             <a:pPr algn="ctr"/>
+            <a:endParaRPr/>
           </a:p>
         </p:txBody>
       </p:sp>
@@ -10948,6 +12896,7 @@
           <a:lstStyle/>
           <a:p>
             <a:pPr algn="ctr"/>
+            <a:endParaRPr/>
           </a:p>
         </p:txBody>
       </p:sp>
@@ -10991,6 +12940,7 @@
           <a:lstStyle/>
           <a:p>
             <a:pPr algn="ctr"/>
+            <a:endParaRPr/>
           </a:p>
         </p:txBody>
       </p:sp>
@@ -11034,6 +12984,7 @@
           <a:lstStyle/>
           <a:p>
             <a:pPr algn="ctr"/>
+            <a:endParaRPr/>
           </a:p>
         </p:txBody>
       </p:sp>
@@ -11077,6 +13028,7 @@
           <a:lstStyle/>
           <a:p>
             <a:pPr algn="ctr"/>
+            <a:endParaRPr/>
           </a:p>
         </p:txBody>
       </p:sp>
@@ -11122,6 +13074,7 @@
           <a:lstStyle/>
           <a:p>
             <a:pPr algn="ctr"/>
+            <a:endParaRPr/>
           </a:p>
         </p:txBody>
       </p:sp>
@@ -11203,6 +13156,7 @@
           <a:lstStyle/>
           <a:p>
             <a:pPr algn="ctr"/>
+            <a:endParaRPr/>
           </a:p>
         </p:txBody>
       </p:sp>
@@ -11215,7 +13169,7 @@
         <p:spPr>
           <a:xfrm>
             <a:off x="457200" y="3703320"/>
-            <a:ext cx="8229600" cy="502920"/>
+            <a:ext cx="8229600" cy="338554"/>
           </a:xfrm>
           <a:prstGeom prst="rect">
             <a:avLst/>
@@ -11233,13 +13187,31 @@
           <a:p>
             <a:pPr algn="l"/>
             <a:r>
-              <a:rPr sz="1600" b="0">
+              <a:rPr sz="1600" b="0" dirty="0">
                 <a:solidFill>
                   <a:srgbClr val="B0BEC5"/>
                 </a:solidFill>
                 <a:latin typeface="Calibri"/>
               </a:rPr>
-              <a:t>Ahmed Al-Sadeq  |  HR Business Partner  |  51Talk Egypt</a:t>
+              <a:t>Ahmed </a:t>
+            </a:r>
+            <a:r>
+              <a:rPr lang="en-US" sz="1600" dirty="0">
+                <a:solidFill>
+                  <a:srgbClr val="B0BEC5"/>
+                </a:solidFill>
+                <a:latin typeface="Calibri"/>
+              </a:rPr>
+              <a:t>Elsadek</a:t>
+            </a:r>
+            <a:r>
+              <a:rPr sz="1600" b="0" dirty="0">
+                <a:solidFill>
+                  <a:srgbClr val="B0BEC5"/>
+                </a:solidFill>
+                <a:latin typeface="Calibri"/>
+              </a:rPr>
+              <a:t>  |  HR Business Partner  |  51Talk Egypt</a:t>
             </a:r>
           </a:p>
         </p:txBody>
@@ -11291,7 +13263,7 @@
         <p:spPr>
           <a:xfrm>
             <a:off x="9601200" y="6309360"/>
-            <a:ext cx="2286000" cy="347472"/>
+            <a:ext cx="2286000" cy="261610"/>
           </a:xfrm>
           <a:prstGeom prst="rect">
             <a:avLst/>
@@ -11309,7 +13281,7 @@
           <a:p>
             <a:pPr algn="r"/>
             <a:r>
-              <a:rPr sz="1100" b="0">
+              <a:rPr sz="1100" b="1" dirty="0">
                 <a:solidFill>
                   <a:srgbClr val="F5C430"/>
                 </a:solidFill>
@@ -11320,6 +13292,36 @@
           </a:p>
         </p:txBody>
       </p:sp>
+      <p:pic>
+        <p:nvPicPr>
+          <p:cNvPr id="22" name="Picture 21">
+            <a:extLst>
+              <a:ext uri="{FF2B5EF4-FFF2-40B4-BE49-F238E27FC236}">
+                <a16:creationId xmlns:a16="http://schemas.microsoft.com/office/drawing/2014/main" id="{ABAE059D-C9E5-99A9-33CA-77B4FE485AB3}"/>
+              </a:ext>
+            </a:extLst>
+          </p:cNvPr>
+          <p:cNvPicPr>
+            <a:picLocks noChangeAspect="1"/>
+          </p:cNvPicPr>
+          <p:nvPr/>
+        </p:nvPicPr>
+        <p:blipFill>
+          <a:blip r:embed="rId2"/>
+          <a:stretch>
+            <a:fillRect/>
+          </a:stretch>
+        </p:blipFill>
+        <p:spPr>
+          <a:xfrm>
+            <a:off x="9667311" y="1485468"/>
+            <a:ext cx="2224134" cy="2149704"/>
+          </a:xfrm>
+          <a:prstGeom prst="rect">
+            <a:avLst/>
+          </a:prstGeom>
+        </p:spPr>
+      </p:pic>
     </p:spTree>
   </p:cSld>
   <p:clrMapOvr>
